--- a/backend/assets/templates/red-final/template.pptx
+++ b/backend/assets/templates/red-final/template.pptx
@@ -20,17 +20,16 @@
     <p:sldId id="265" r:id="rId16"/>
     <p:sldId id="266" r:id="rId17"/>
     <p:sldId id="267" r:id="rId18"/>
-    <p:sldId id="268" r:id="rId19"/>
   </p:sldIdLst>
   <p:sldSz cy="20574000" cx="36576000"/>
   <p:notesSz cx="6858000" cy="9144000"/>
   <p:embeddedFontLst>
     <p:embeddedFont>
       <p:font typeface="Poppins"/>
-      <p:regular r:id="rId20"/>
-      <p:bold r:id="rId21"/>
-      <p:italic r:id="rId22"/>
-      <p:boldItalic r:id="rId23"/>
+      <p:regular r:id="rId19"/>
+      <p:bold r:id="rId20"/>
+      <p:italic r:id="rId21"/>
+      <p:boldItalic r:id="rId22"/>
     </p:embeddedFont>
   </p:embeddedFontLst>
   <p:defaultTextStyle>
@@ -1893,7 +1892,7 @@
       </p:grpSpPr>
       <p:sp>
         <p:nvSpPr>
-          <p:cNvPr id="243" name="Google Shape;243;p8:notes"/>
+          <p:cNvPr id="243" name="Google Shape;243;p10:notes"/>
           <p:cNvSpPr/>
           <p:nvPr>
             <p:ph idx="2" type="sldImg"/>
@@ -1938,7 +1937,7 @@
       </p:sp>
       <p:sp>
         <p:nvSpPr>
-          <p:cNvPr id="244" name="Google Shape;244;p8:notes"/>
+          <p:cNvPr id="244" name="Google Shape;244;p10:notes"/>
           <p:cNvSpPr txBox="1"/>
           <p:nvPr>
             <p:ph idx="1" type="body"/>
@@ -1985,7 +1984,7 @@
       </p:sp>
       <p:sp>
         <p:nvSpPr>
-          <p:cNvPr id="245" name="Google Shape;245;p8:notes"/>
+          <p:cNvPr id="245" name="Google Shape;245;p10:notes"/>
           <p:cNvSpPr txBox="1"/>
           <p:nvPr>
             <p:ph idx="12" type="sldNum"/>
@@ -2058,7 +2057,7 @@
       </p:grpSpPr>
       <p:sp>
         <p:nvSpPr>
-          <p:cNvPr id="249" name="Google Shape;249;p9:notes"/>
+          <p:cNvPr id="249" name="Google Shape;249;p11:notes"/>
           <p:cNvSpPr txBox="1"/>
           <p:nvPr>
             <p:ph idx="1" type="body"/>
@@ -2105,7 +2104,7 @@
       </p:sp>
       <p:sp>
         <p:nvSpPr>
-          <p:cNvPr id="250" name="Google Shape;250;p9:notes"/>
+          <p:cNvPr id="250" name="Google Shape;250;p11:notes"/>
           <p:cNvSpPr/>
           <p:nvPr>
             <p:ph idx="2" type="sldImg"/>
@@ -2175,52 +2174,7 @@
       </p:grpSpPr>
       <p:sp>
         <p:nvSpPr>
-          <p:cNvPr id="273" name="Google Shape;273;p12:notes"/>
-          <p:cNvSpPr/>
-          <p:nvPr>
-            <p:ph idx="2" type="sldImg"/>
-          </p:nvPr>
-        </p:nvSpPr>
-        <p:spPr>
-          <a:xfrm>
-            <a:off x="685800" y="1143000"/>
-            <a:ext cx="5486400" cy="3086100"/>
-          </a:xfrm>
-          <a:custGeom>
-            <a:rect b="b" l="l" r="r" t="t"/>
-            <a:pathLst>
-              <a:path extrusionOk="0" h="120000" w="120000">
-                <a:moveTo>
-                  <a:pt x="0" y="0"/>
-                </a:moveTo>
-                <a:lnTo>
-                  <a:pt x="120000" y="0"/>
-                </a:lnTo>
-                <a:lnTo>
-                  <a:pt x="120000" y="120000"/>
-                </a:lnTo>
-                <a:lnTo>
-                  <a:pt x="0" y="120000"/>
-                </a:lnTo>
-                <a:close/>
-              </a:path>
-            </a:pathLst>
-          </a:custGeom>
-          <a:noFill/>
-          <a:ln cap="flat" cmpd="sng" w="12700">
-            <a:solidFill>
-              <a:srgbClr val="000000"/>
-            </a:solidFill>
-            <a:prstDash val="solid"/>
-            <a:round/>
-            <a:headEnd len="sm" w="sm" type="none"/>
-            <a:tailEnd len="sm" w="sm" type="none"/>
-          </a:ln>
-        </p:spPr>
-      </p:sp>
-      <p:sp>
-        <p:nvSpPr>
-          <p:cNvPr id="274" name="Google Shape;274;p12:notes"/>
+          <p:cNvPr id="273" name="Google Shape;273;p13:notes"/>
           <p:cNvSpPr txBox="1"/>
           <p:nvPr>
             <p:ph idx="1" type="body"/>
@@ -2267,127 +2221,7 @@
       </p:sp>
       <p:sp>
         <p:nvSpPr>
-          <p:cNvPr id="275" name="Google Shape;275;p12:notes"/>
-          <p:cNvSpPr txBox="1"/>
-          <p:nvPr>
-            <p:ph idx="12" type="sldNum"/>
-          </p:nvPr>
-        </p:nvSpPr>
-        <p:spPr>
-          <a:xfrm>
-            <a:off x="3884613" y="8685213"/>
-            <a:ext cx="2971800" cy="458787"/>
-          </a:xfrm>
-          <a:prstGeom prst="rect">
-            <a:avLst/>
-          </a:prstGeom>
-          <a:noFill/>
-          <a:ln>
-            <a:noFill/>
-          </a:ln>
-        </p:spPr>
-        <p:txBody>
-          <a:bodyPr anchorCtr="0" anchor="b" bIns="45700" lIns="91425" spcFirstLastPara="1" rIns="91425" wrap="square" tIns="45700">
-            <a:noAutofit/>
-          </a:bodyPr>
-          <a:lstStyle/>
-          <a:p>
-            <a:pPr indent="0" lvl="0" marL="0" rtl="0" algn="r">
-              <a:lnSpc>
-                <a:spcPct val="100000"/>
-              </a:lnSpc>
-              <a:spcBef>
-                <a:spcPts val="0"/>
-              </a:spcBef>
-              <a:spcAft>
-                <a:spcPts val="0"/>
-              </a:spcAft>
-              <a:buSzPts val="1400"/>
-              <a:buNone/>
-            </a:pPr>
-            <a:fld id="{00000000-1234-1234-1234-123412341234}" type="slidenum">
-              <a:rPr lang="en-IN"/>
-              <a:t>‹#›</a:t>
-            </a:fld>
-            <a:endParaRPr/>
-          </a:p>
-        </p:txBody>
-      </p:sp>
-    </p:spTree>
-  </p:cSld>
-  <p:clrMapOvr>
-    <a:masterClrMapping/>
-  </p:clrMapOvr>
-</p:notes>
-</file>
-
-<file path=ppt/notesSlides/notesSlide13.xml><?xml version="1.0" encoding="utf-8"?>
-<p:notes xmlns:a="http://schemas.openxmlformats.org/drawingml/2006/main" xmlns:r="http://schemas.openxmlformats.org/officeDocument/2006/relationships" xmlns:mc="http://schemas.openxmlformats.org/markup-compatibility/2006" xmlns:mv="urn:schemas-microsoft-com:mac:vml" xmlns:p="http://schemas.openxmlformats.org/presentationml/2006/main" xmlns:c="http://schemas.openxmlformats.org/drawingml/2006/chart" xmlns:dgm="http://schemas.openxmlformats.org/drawingml/2006/diagram" xmlns:o="urn:schemas-microsoft-com:office:office" xmlns:v="urn:schemas-microsoft-com:vml" xmlns:pvml="urn:schemas-microsoft-com:office:powerpoint" xmlns:com="http://schemas.openxmlformats.org/drawingml/2006/compatibility" xmlns:p14="http://schemas.microsoft.com/office/powerpoint/2010/main" xmlns:p15="http://schemas.microsoft.com/office/powerpoint/2012/main" xmlns:ahyp="http://schemas.microsoft.com/office/drawing/2018/hyperlinkcolor" showMasterPhAnim="0" showMasterSp="0">
-  <p:cSld>
-    <p:spTree>
-      <p:nvGrpSpPr>
-        <p:cNvPr id="282" name="Shape 282"/>
-        <p:cNvGrpSpPr/>
-        <p:nvPr/>
-      </p:nvGrpSpPr>
-      <p:grpSpPr>
-        <a:xfrm>
-          <a:off x="0" y="0"/>
-          <a:ext cx="0" cy="0"/>
-          <a:chOff x="0" y="0"/>
-          <a:chExt cx="0" cy="0"/>
-        </a:xfrm>
-      </p:grpSpPr>
-      <p:sp>
-        <p:nvSpPr>
-          <p:cNvPr id="283" name="Google Shape;283;p13:notes"/>
-          <p:cNvSpPr txBox="1"/>
-          <p:nvPr>
-            <p:ph idx="1" type="body"/>
-          </p:nvPr>
-        </p:nvSpPr>
-        <p:spPr>
-          <a:xfrm>
-            <a:off x="685800" y="4400550"/>
-            <a:ext cx="5486400" cy="3600450"/>
-          </a:xfrm>
-          <a:prstGeom prst="rect">
-            <a:avLst/>
-          </a:prstGeom>
-          <a:noFill/>
-          <a:ln>
-            <a:noFill/>
-          </a:ln>
-        </p:spPr>
-        <p:txBody>
-          <a:bodyPr anchorCtr="0" anchor="t" bIns="45700" lIns="91425" spcFirstLastPara="1" rIns="91425" wrap="square" tIns="45700">
-            <a:noAutofit/>
-          </a:bodyPr>
-          <a:lstStyle/>
-          <a:p>
-            <a:pPr indent="0" lvl="0" marL="0" rtl="0" algn="l">
-              <a:lnSpc>
-                <a:spcPct val="100000"/>
-              </a:lnSpc>
-              <a:spcBef>
-                <a:spcPts val="0"/>
-              </a:spcBef>
-              <a:spcAft>
-                <a:spcPts val="0"/>
-              </a:spcAft>
-              <a:buSzPts val="1400"/>
-              <a:buNone/>
-            </a:pPr>
-            <a:r>
-              <a:t/>
-            </a:r>
-            <a:endParaRPr/>
-          </a:p>
-        </p:txBody>
-      </p:sp>
-      <p:sp>
-        <p:nvSpPr>
-          <p:cNvPr id="284" name="Google Shape;284;p13:notes"/>
+          <p:cNvPr id="274" name="Google Shape;274;p13:notes"/>
           <p:cNvSpPr/>
           <p:nvPr>
             <p:ph idx="2" type="sldImg"/>
@@ -3447,7 +3281,7 @@
       </p:grpSpPr>
       <p:sp>
         <p:nvSpPr>
-          <p:cNvPr id="225" name="Google Shape;225;p10:notes"/>
+          <p:cNvPr id="225" name="Google Shape;225;p8:notes"/>
           <p:cNvSpPr/>
           <p:nvPr>
             <p:ph idx="2" type="sldImg"/>
@@ -3492,7 +3326,7 @@
       </p:sp>
       <p:sp>
         <p:nvSpPr>
-          <p:cNvPr id="226" name="Google Shape;226;p10:notes"/>
+          <p:cNvPr id="226" name="Google Shape;226;p8:notes"/>
           <p:cNvSpPr txBox="1"/>
           <p:nvPr>
             <p:ph idx="1" type="body"/>
@@ -3539,7 +3373,7 @@
       </p:sp>
       <p:sp>
         <p:nvSpPr>
-          <p:cNvPr id="227" name="Google Shape;227;p10:notes"/>
+          <p:cNvPr id="227" name="Google Shape;227;p8:notes"/>
           <p:cNvSpPr txBox="1"/>
           <p:nvPr>
             <p:ph idx="12" type="sldNum"/>
@@ -3612,7 +3446,7 @@
       </p:grpSpPr>
       <p:sp>
         <p:nvSpPr>
-          <p:cNvPr id="234" name="Google Shape;234;p11:notes"/>
+          <p:cNvPr id="234" name="Google Shape;234;p9:notes"/>
           <p:cNvSpPr/>
           <p:nvPr>
             <p:ph idx="2" type="sldImg"/>
@@ -3657,7 +3491,7 @@
       </p:sp>
       <p:sp>
         <p:nvSpPr>
-          <p:cNvPr id="235" name="Google Shape;235;p11:notes"/>
+          <p:cNvPr id="235" name="Google Shape;235;p9:notes"/>
           <p:cNvSpPr txBox="1"/>
           <p:nvPr>
             <p:ph idx="1" type="body"/>
@@ -3704,7 +3538,7 @@
       </p:sp>
       <p:sp>
         <p:nvSpPr>
-          <p:cNvPr id="236" name="Google Shape;236;p11:notes"/>
+          <p:cNvPr id="236" name="Google Shape;236;p9:notes"/>
           <p:cNvSpPr txBox="1"/>
           <p:nvPr>
             <p:ph idx="12" type="sldNum"/>
@@ -20371,6 +20205,11 @@
                 <a:spcAft>
                   <a:spcPts val="0"/>
                 </a:spcAft>
+                <a:buClr>
+                  <a:srgbClr val="000000"/>
+                </a:buClr>
+                <a:buSzPts val="1800"/>
+                <a:buFont typeface="Arial"/>
                 <a:buNone/>
               </a:pPr>
               <a:r>
@@ -20546,6 +20385,11 @@
                 <a:spcAft>
                   <a:spcPts val="0"/>
                 </a:spcAft>
+                <a:buClr>
+                  <a:srgbClr val="000000"/>
+                </a:buClr>
+                <a:buSzPts val="1400"/>
+                <a:buFont typeface="Arial"/>
                 <a:buNone/>
               </a:pPr>
               <a:r>
@@ -20627,6 +20471,11 @@
                 <a:spcAft>
                   <a:spcPts val="0"/>
                 </a:spcAft>
+                <a:buClr>
+                  <a:srgbClr val="000000"/>
+                </a:buClr>
+                <a:buSzPts val="1400"/>
+                <a:buFont typeface="Arial"/>
                 <a:buNone/>
               </a:pPr>
               <a:r>
@@ -20679,6 +20528,11 @@
                 <a:spcAft>
                   <a:spcPts val="0"/>
                 </a:spcAft>
+                <a:buClr>
+                  <a:srgbClr val="000000"/>
+                </a:buClr>
+                <a:buSzPts val="7200"/>
+                <a:buFont typeface="Arial"/>
                 <a:buNone/>
               </a:pPr>
               <a:r>
@@ -20693,7 +20547,15 @@
                 </a:rPr>
                 <a:t>1</a:t>
               </a:r>
-              <a:endParaRPr/>
+              <a:endParaRPr b="0" i="0" sz="1400" u="none" cap="none" strike="noStrike">
+                <a:solidFill>
+                  <a:srgbClr val="000000"/>
+                </a:solidFill>
+                <a:latin typeface="Arial"/>
+                <a:ea typeface="Arial"/>
+                <a:cs typeface="Arial"/>
+                <a:sym typeface="Arial"/>
+              </a:endParaRPr>
             </a:p>
           </p:txBody>
         </p:sp>
@@ -20755,6 +20617,11 @@
                 <a:spcAft>
                   <a:spcPts val="0"/>
                 </a:spcAft>
+                <a:buClr>
+                  <a:srgbClr val="000000"/>
+                </a:buClr>
+                <a:buSzPts val="1400"/>
+                <a:buFont typeface="Arial"/>
                 <a:buNone/>
               </a:pPr>
               <a:r>
@@ -20836,6 +20703,11 @@
                 <a:spcAft>
                   <a:spcPts val="0"/>
                 </a:spcAft>
+                <a:buClr>
+                  <a:srgbClr val="000000"/>
+                </a:buClr>
+                <a:buSzPts val="1400"/>
+                <a:buFont typeface="Arial"/>
                 <a:buNone/>
               </a:pPr>
               <a:r>
@@ -20888,6 +20760,11 @@
                 <a:spcAft>
                   <a:spcPts val="0"/>
                 </a:spcAft>
+                <a:buClr>
+                  <a:srgbClr val="000000"/>
+                </a:buClr>
+                <a:buSzPts val="7200"/>
+                <a:buFont typeface="Arial"/>
                 <a:buNone/>
               </a:pPr>
               <a:r>
@@ -20902,7 +20779,15 @@
                 </a:rPr>
                 <a:t>2</a:t>
               </a:r>
-              <a:endParaRPr/>
+              <a:endParaRPr b="0" i="0" sz="1400" u="none" cap="none" strike="noStrike">
+                <a:solidFill>
+                  <a:srgbClr val="000000"/>
+                </a:solidFill>
+                <a:latin typeface="Arial"/>
+                <a:ea typeface="Arial"/>
+                <a:cs typeface="Arial"/>
+                <a:sym typeface="Arial"/>
+              </a:endParaRPr>
             </a:p>
           </p:txBody>
         </p:sp>
@@ -20964,6 +20849,11 @@
                 <a:spcAft>
                   <a:spcPts val="0"/>
                 </a:spcAft>
+                <a:buClr>
+                  <a:srgbClr val="000000"/>
+                </a:buClr>
+                <a:buSzPts val="1400"/>
+                <a:buFont typeface="Arial"/>
                 <a:buNone/>
               </a:pPr>
               <a:r>
@@ -21045,6 +20935,11 @@
                 <a:spcAft>
                   <a:spcPts val="0"/>
                 </a:spcAft>
+                <a:buClr>
+                  <a:srgbClr val="000000"/>
+                </a:buClr>
+                <a:buSzPts val="1400"/>
+                <a:buFont typeface="Arial"/>
                 <a:buNone/>
               </a:pPr>
               <a:r>
@@ -21097,6 +20992,11 @@
                 <a:spcAft>
                   <a:spcPts val="0"/>
                 </a:spcAft>
+                <a:buClr>
+                  <a:srgbClr val="000000"/>
+                </a:buClr>
+                <a:buSzPts val="7200"/>
+                <a:buFont typeface="Arial"/>
                 <a:buNone/>
               </a:pPr>
               <a:r>
@@ -21111,7 +21011,15 @@
                 </a:rPr>
                 <a:t>3</a:t>
               </a:r>
-              <a:endParaRPr/>
+              <a:endParaRPr b="0" i="0" sz="1400" u="none" cap="none" strike="noStrike">
+                <a:solidFill>
+                  <a:srgbClr val="000000"/>
+                </a:solidFill>
+                <a:latin typeface="Arial"/>
+                <a:ea typeface="Arial"/>
+                <a:cs typeface="Arial"/>
+                <a:sym typeface="Arial"/>
+              </a:endParaRPr>
             </a:p>
           </p:txBody>
         </p:sp>
@@ -21173,6 +21081,11 @@
                 <a:spcAft>
                   <a:spcPts val="0"/>
                 </a:spcAft>
+                <a:buClr>
+                  <a:srgbClr val="000000"/>
+                </a:buClr>
+                <a:buSzPts val="1400"/>
+                <a:buFont typeface="Arial"/>
                 <a:buNone/>
               </a:pPr>
               <a:r>
@@ -21254,6 +21167,11 @@
                 <a:spcAft>
                   <a:spcPts val="0"/>
                 </a:spcAft>
+                <a:buClr>
+                  <a:srgbClr val="000000"/>
+                </a:buClr>
+                <a:buSzPts val="1400"/>
+                <a:buFont typeface="Arial"/>
                 <a:buNone/>
               </a:pPr>
               <a:r>
@@ -21306,6 +21224,11 @@
                 <a:spcAft>
                   <a:spcPts val="0"/>
                 </a:spcAft>
+                <a:buClr>
+                  <a:srgbClr val="000000"/>
+                </a:buClr>
+                <a:buSzPts val="7200"/>
+                <a:buFont typeface="Arial"/>
                 <a:buNone/>
               </a:pPr>
               <a:r>
@@ -21320,7 +21243,15 @@
                 </a:rPr>
                 <a:t>4</a:t>
               </a:r>
-              <a:endParaRPr/>
+              <a:endParaRPr b="0" i="0" sz="1400" u="none" cap="none" strike="noStrike">
+                <a:solidFill>
+                  <a:srgbClr val="000000"/>
+                </a:solidFill>
+                <a:latin typeface="Arial"/>
+                <a:ea typeface="Arial"/>
+                <a:cs typeface="Arial"/>
+                <a:sym typeface="Arial"/>
+              </a:endParaRPr>
             </a:p>
           </p:txBody>
         </p:sp>
@@ -21360,6 +21291,11 @@
               <a:spcAft>
                 <a:spcPts val="0"/>
               </a:spcAft>
+              <a:buClr>
+                <a:srgbClr val="000000"/>
+              </a:buClr>
+              <a:buSzPts val="6000"/>
+              <a:buFont typeface="Arial"/>
               <a:buNone/>
             </a:pPr>
             <a:r>
@@ -21374,7 +21310,15 @@
               </a:rPr>
               <a:t>Type option here</a:t>
             </a:r>
-            <a:endParaRPr/>
+            <a:endParaRPr b="0" i="0" sz="1400" u="none" cap="none" strike="noStrike">
+              <a:solidFill>
+                <a:srgbClr val="000000"/>
+              </a:solidFill>
+              <a:latin typeface="Arial"/>
+              <a:ea typeface="Arial"/>
+              <a:cs typeface="Arial"/>
+              <a:sym typeface="Arial"/>
+            </a:endParaRPr>
           </a:p>
         </p:txBody>
       </p:sp>
@@ -21413,6 +21357,11 @@
               <a:spcAft>
                 <a:spcPts val="0"/>
               </a:spcAft>
+              <a:buClr>
+                <a:srgbClr val="000000"/>
+              </a:buClr>
+              <a:buSzPts val="6000"/>
+              <a:buFont typeface="Arial"/>
               <a:buNone/>
             </a:pPr>
             <a:r>
@@ -21427,7 +21376,15 @@
               </a:rPr>
               <a:t>Type option here</a:t>
             </a:r>
-            <a:endParaRPr/>
+            <a:endParaRPr b="0" i="0" sz="1400" u="none" cap="none" strike="noStrike">
+              <a:solidFill>
+                <a:srgbClr val="000000"/>
+              </a:solidFill>
+              <a:latin typeface="Arial"/>
+              <a:ea typeface="Arial"/>
+              <a:cs typeface="Arial"/>
+              <a:sym typeface="Arial"/>
+            </a:endParaRPr>
           </a:p>
         </p:txBody>
       </p:sp>
@@ -21466,6 +21423,11 @@
               <a:spcAft>
                 <a:spcPts val="0"/>
               </a:spcAft>
+              <a:buClr>
+                <a:srgbClr val="000000"/>
+              </a:buClr>
+              <a:buSzPts val="6000"/>
+              <a:buFont typeface="Arial"/>
               <a:buNone/>
             </a:pPr>
             <a:r>
@@ -21480,7 +21442,15 @@
               </a:rPr>
               <a:t>Type option here</a:t>
             </a:r>
-            <a:endParaRPr/>
+            <a:endParaRPr b="0" i="0" sz="1400" u="none" cap="none" strike="noStrike">
+              <a:solidFill>
+                <a:srgbClr val="000000"/>
+              </a:solidFill>
+              <a:latin typeface="Arial"/>
+              <a:ea typeface="Arial"/>
+              <a:cs typeface="Arial"/>
+              <a:sym typeface="Arial"/>
+            </a:endParaRPr>
           </a:p>
         </p:txBody>
       </p:sp>
@@ -21519,6 +21489,11 @@
               <a:spcAft>
                 <a:spcPts val="0"/>
               </a:spcAft>
+              <a:buClr>
+                <a:srgbClr val="000000"/>
+              </a:buClr>
+              <a:buSzPts val="6000"/>
+              <a:buFont typeface="Arial"/>
               <a:buNone/>
             </a:pPr>
             <a:r>
@@ -21533,7 +21508,15 @@
               </a:rPr>
               <a:t>Type option here</a:t>
             </a:r>
-            <a:endParaRPr/>
+            <a:endParaRPr b="0" i="0" sz="1400" u="none" cap="none" strike="noStrike">
+              <a:solidFill>
+                <a:srgbClr val="000000"/>
+              </a:solidFill>
+              <a:latin typeface="Arial"/>
+              <a:ea typeface="Arial"/>
+              <a:cs typeface="Arial"/>
+              <a:sym typeface="Arial"/>
+            </a:endParaRPr>
           </a:p>
         </p:txBody>
       </p:sp>
@@ -21596,7 +21579,7 @@
             <a:tbl>
               <a:tblPr bandRow="1" firstRow="1">
                 <a:noFill/>
-                <a:tableStyleId>{E6A8F306-22CD-4106-867A-C230312C71DA}</a:tableStyleId>
+                <a:tableStyleId>{8009B67A-4571-4B0B-BC30-693B253E2A07}</a:tableStyleId>
               </a:tblPr>
               <a:tblGrid>
                 <a:gridCol w="4876800"/>
@@ -21640,7 +21623,7 @@
                         </a:rPr>
                         <a:t>Heading</a:t>
                       </a:r>
-                      <a:endParaRPr/>
+                      <a:endParaRPr sz="1400" u="none" cap="none" strike="noStrike"/>
                     </a:p>
                   </a:txBody>
                   <a:tcPr marT="45725" marB="45725" marR="91450" marL="91450" anchor="ctr">
@@ -21716,7 +21699,7 @@
                         </a:rPr>
                         <a:t>SL. No.</a:t>
                       </a:r>
-                      <a:endParaRPr/>
+                      <a:endParaRPr sz="1400" u="none" cap="none" strike="noStrike"/>
                     </a:p>
                   </a:txBody>
                   <a:tcPr marT="45725" marB="45725" marR="91450" marL="91450" anchor="ctr">
@@ -21792,7 +21775,7 @@
                         </a:rPr>
                         <a:t>Subject</a:t>
                       </a:r>
-                      <a:endParaRPr/>
+                      <a:endParaRPr sz="1400" u="none" cap="none" strike="noStrike"/>
                     </a:p>
                   </a:txBody>
                   <a:tcPr marT="45725" marB="45725" marR="91450" marL="91450" anchor="ctr">
@@ -22036,7 +22019,7 @@
                         </a:rPr>
                         <a:t>Subject</a:t>
                       </a:r>
-                      <a:endParaRPr/>
+                      <a:endParaRPr sz="1400" u="none" cap="none" strike="noStrike"/>
                     </a:p>
                   </a:txBody>
                   <a:tcPr marT="45725" marB="45725" marR="91450" marL="91450" anchor="ctr">
@@ -22114,7 +22097,7 @@
                         </a:rPr>
                         <a:t>1.</a:t>
                       </a:r>
-                      <a:endParaRPr/>
+                      <a:endParaRPr sz="1400" u="none" cap="none" strike="noStrike"/>
                     </a:p>
                   </a:txBody>
                   <a:tcPr marT="45725" marB="45725" marR="91450" marL="91450" anchor="ctr">
@@ -22190,7 +22173,7 @@
                         </a:rPr>
                         <a:t>Body</a:t>
                       </a:r>
-                      <a:endParaRPr/>
+                      <a:endParaRPr sz="1400" u="none" cap="none" strike="noStrike"/>
                     </a:p>
                   </a:txBody>
                   <a:tcPr marT="45725" marB="45725" marR="91450" marL="91450" anchor="ctr">
@@ -22520,7 +22503,7 @@
                         </a:rPr>
                         <a:t>2.</a:t>
                       </a:r>
-                      <a:endParaRPr/>
+                      <a:endParaRPr sz="1400" u="none" cap="none" strike="noStrike"/>
                     </a:p>
                   </a:txBody>
                   <a:tcPr marT="45725" marB="45725" marR="91450" marL="91450" anchor="ctr">
@@ -22596,7 +22579,7 @@
                         </a:rPr>
                         <a:t>Body</a:t>
                       </a:r>
-                      <a:endParaRPr/>
+                      <a:endParaRPr sz="1400" u="none" cap="none" strike="noStrike"/>
                     </a:p>
                   </a:txBody>
                   <a:tcPr marT="45725" marB="45725" marR="91450" marL="91450" anchor="ctr">
@@ -22926,7 +22909,7 @@
                         </a:rPr>
                         <a:t>3.</a:t>
                       </a:r>
-                      <a:endParaRPr/>
+                      <a:endParaRPr sz="1400" u="none" cap="none" strike="noStrike"/>
                     </a:p>
                   </a:txBody>
                   <a:tcPr marT="45725" marB="45725" marR="91450" marL="91450" anchor="ctr">
@@ -23002,7 +22985,7 @@
                         </a:rPr>
                         <a:t>Body</a:t>
                       </a:r>
-                      <a:endParaRPr/>
+                      <a:endParaRPr sz="1400" u="none" cap="none" strike="noStrike"/>
                     </a:p>
                   </a:txBody>
                   <a:tcPr marT="45725" marB="45725" marR="91450" marL="91450" anchor="ctr">
@@ -23332,7 +23315,7 @@
                         </a:rPr>
                         <a:t>4.</a:t>
                       </a:r>
-                      <a:endParaRPr/>
+                      <a:endParaRPr sz="1400" u="none" cap="none" strike="noStrike"/>
                     </a:p>
                   </a:txBody>
                   <a:tcPr marT="45725" marB="45725" marR="91450" marL="91450" anchor="ctr">
@@ -23408,7 +23391,7 @@
                         </a:rPr>
                         <a:t>Body</a:t>
                       </a:r>
-                      <a:endParaRPr/>
+                      <a:endParaRPr sz="1400" u="none" cap="none" strike="noStrike"/>
                     </a:p>
                   </a:txBody>
                   <a:tcPr marT="45725" marB="45725" marR="91450" marL="91450" anchor="ctr">
@@ -23738,7 +23721,7 @@
                         </a:rPr>
                         <a:t>5.</a:t>
                       </a:r>
-                      <a:endParaRPr/>
+                      <a:endParaRPr sz="1400" u="none" cap="none" strike="noStrike"/>
                     </a:p>
                   </a:txBody>
                   <a:tcPr marT="45725" marB="45725" marR="91450" marL="91450" anchor="ctr">
@@ -23814,7 +23797,7 @@
                         </a:rPr>
                         <a:t>Body</a:t>
                       </a:r>
-                      <a:endParaRPr/>
+                      <a:endParaRPr sz="1400" u="none" cap="none" strike="noStrike"/>
                     </a:p>
                   </a:txBody>
                   <a:tcPr marT="45725" marB="45725" marR="91450" marL="91450" anchor="ctr">
@@ -24144,7 +24127,7 @@
                         </a:rPr>
                         <a:t>6.</a:t>
                       </a:r>
-                      <a:endParaRPr/>
+                      <a:endParaRPr sz="1400" u="none" cap="none" strike="noStrike"/>
                     </a:p>
                   </a:txBody>
                   <a:tcPr marT="45725" marB="45725" marR="91450" marL="91450" anchor="ctr">
@@ -24220,7 +24203,7 @@
                         </a:rPr>
                         <a:t>Body</a:t>
                       </a:r>
-                      <a:endParaRPr/>
+                      <a:endParaRPr sz="1400" u="none" cap="none" strike="noStrike"/>
                     </a:p>
                   </a:txBody>
                   <a:tcPr marT="45725" marB="45725" marR="91450" marL="91450" anchor="ctr">
@@ -24550,7 +24533,7 @@
                         </a:rPr>
                         <a:t>7.</a:t>
                       </a:r>
-                      <a:endParaRPr/>
+                      <a:endParaRPr sz="1400" u="none" cap="none" strike="noStrike"/>
                     </a:p>
                   </a:txBody>
                   <a:tcPr marT="45725" marB="45725" marR="91450" marL="91450" anchor="ctr">
@@ -24626,7 +24609,7 @@
                         </a:rPr>
                         <a:t>Body</a:t>
                       </a:r>
-                      <a:endParaRPr/>
+                      <a:endParaRPr sz="1400" u="none" cap="none" strike="noStrike"/>
                     </a:p>
                   </a:txBody>
                   <a:tcPr marT="45725" marB="45725" marR="91450" marL="91450" anchor="ctr">
@@ -24956,7 +24939,7 @@
                         </a:rPr>
                         <a:t>8.</a:t>
                       </a:r>
-                      <a:endParaRPr/>
+                      <a:endParaRPr sz="1400" u="none" cap="none" strike="noStrike"/>
                     </a:p>
                   </a:txBody>
                   <a:tcPr marT="45725" marB="45725" marR="91450" marL="91450" anchor="ctr">
@@ -25032,7 +25015,7 @@
                         </a:rPr>
                         <a:t>Body</a:t>
                       </a:r>
-                      <a:endParaRPr/>
+                      <a:endParaRPr sz="1400" u="none" cap="none" strike="noStrike"/>
                     </a:p>
                   </a:txBody>
                   <a:tcPr marT="45725" marB="45725" marR="91450" marL="91450" anchor="ctr">
@@ -25362,7 +25345,7 @@
                         </a:rPr>
                         <a:t>9.</a:t>
                       </a:r>
-                      <a:endParaRPr/>
+                      <a:endParaRPr sz="1400" u="none" cap="none" strike="noStrike"/>
                     </a:p>
                   </a:txBody>
                   <a:tcPr marT="45725" marB="45725" marR="91450" marL="91450" anchor="ctr">
@@ -25438,7 +25421,7 @@
                         </a:rPr>
                         <a:t>Body</a:t>
                       </a:r>
-                      <a:endParaRPr/>
+                      <a:endParaRPr sz="1400" u="none" cap="none" strike="noStrike"/>
                     </a:p>
                   </a:txBody>
                   <a:tcPr marT="45725" marB="45725" marR="91450" marL="91450" anchor="ctr">
@@ -25514,7 +25497,7 @@
                         </a:rPr>
                         <a:t>Body</a:t>
                       </a:r>
-                      <a:endParaRPr/>
+                      <a:endParaRPr sz="1400" u="none" cap="none" strike="noStrike"/>
                     </a:p>
                   </a:txBody>
                   <a:tcPr marT="45725" marB="45725" marR="91450" marL="91450" anchor="ctr">
@@ -25590,7 +25573,7 @@
                         </a:rPr>
                         <a:t>Body</a:t>
                       </a:r>
-                      <a:endParaRPr/>
+                      <a:endParaRPr sz="1400" u="none" cap="none" strike="noStrike"/>
                     </a:p>
                   </a:txBody>
                   <a:tcPr marT="45725" marB="45725" marR="91450" marL="91450" anchor="ctr">
@@ -25666,7 +25649,7 @@
                         </a:rPr>
                         <a:t>Body</a:t>
                       </a:r>
-                      <a:endParaRPr/>
+                      <a:endParaRPr sz="1400" u="none" cap="none" strike="noStrike"/>
                     </a:p>
                   </a:txBody>
                   <a:tcPr marT="45725" marB="45725" marR="91450" marL="91450" anchor="ctr">
@@ -25744,7 +25727,7 @@
                         </a:rPr>
                         <a:t>10.</a:t>
                       </a:r>
-                      <a:endParaRPr/>
+                      <a:endParaRPr sz="1400" u="none" cap="none" strike="noStrike"/>
                     </a:p>
                   </a:txBody>
                   <a:tcPr marT="45725" marB="45725" marR="91450" marL="91450" anchor="ctr">
@@ -25820,7 +25803,7 @@
                         </a:rPr>
                         <a:t>Body</a:t>
                       </a:r>
-                      <a:endParaRPr/>
+                      <a:endParaRPr sz="1400" u="none" cap="none" strike="noStrike"/>
                     </a:p>
                   </a:txBody>
                   <a:tcPr marT="45725" marB="45725" marR="91450" marL="91450" anchor="ctr">
@@ -25896,7 +25879,7 @@
                         </a:rPr>
                         <a:t>Body</a:t>
                       </a:r>
-                      <a:endParaRPr/>
+                      <a:endParaRPr sz="1400" u="none" cap="none" strike="noStrike"/>
                     </a:p>
                   </a:txBody>
                   <a:tcPr marT="45725" marB="45725" marR="91450" marL="91450" anchor="ctr">
@@ -25972,7 +25955,7 @@
                         </a:rPr>
                         <a:t>Body</a:t>
                       </a:r>
-                      <a:endParaRPr/>
+                      <a:endParaRPr sz="1400" u="none" cap="none" strike="noStrike"/>
                     </a:p>
                   </a:txBody>
                   <a:tcPr marT="45725" marB="45725" marR="91450" marL="91450" anchor="ctr">
@@ -26048,7 +26031,7 @@
                         </a:rPr>
                         <a:t>Body</a:t>
                       </a:r>
-                      <a:endParaRPr/>
+                      <a:endParaRPr sz="1400" u="none" cap="none" strike="noStrike"/>
                     </a:p>
                   </a:txBody>
                   <a:tcPr marT="45725" marB="45725" marR="91450" marL="91450" anchor="ctr">
@@ -26198,6 +26181,11 @@
                 <a:spcAft>
                   <a:spcPts val="0"/>
                 </a:spcAft>
+                <a:buClr>
+                  <a:srgbClr val="000000"/>
+                </a:buClr>
+                <a:buSzPts val="1800"/>
+                <a:buFont typeface="Arial"/>
                 <a:buNone/>
               </a:pPr>
               <a:r>
@@ -26250,6 +26238,11 @@
                 <a:spcAft>
                   <a:spcPts val="0"/>
                 </a:spcAft>
+                <a:buClr>
+                  <a:srgbClr val="000000"/>
+                </a:buClr>
+                <a:buSzPts val="6000"/>
+                <a:buFont typeface="Arial"/>
                 <a:buNone/>
               </a:pPr>
               <a:r>
@@ -26312,6 +26305,11 @@
               <a:spcAft>
                 <a:spcPts val="0"/>
               </a:spcAft>
+              <a:buClr>
+                <a:srgbClr val="000000"/>
+              </a:buClr>
+              <a:buSzPts val="5000"/>
+              <a:buFont typeface="Arial"/>
               <a:buNone/>
             </a:pPr>
             <a:r>
@@ -26373,6 +26371,11 @@
               <a:spcAft>
                 <a:spcPts val="0"/>
               </a:spcAft>
+              <a:buClr>
+                <a:srgbClr val="000000"/>
+              </a:buClr>
+              <a:buSzPts val="5000"/>
+              <a:buFont typeface="Arial"/>
               <a:buNone/>
             </a:pPr>
             <a:r>
@@ -26434,6 +26437,11 @@
               <a:spcAft>
                 <a:spcPts val="0"/>
               </a:spcAft>
+              <a:buClr>
+                <a:srgbClr val="000000"/>
+              </a:buClr>
+              <a:buSzPts val="5000"/>
+              <a:buFont typeface="Arial"/>
               <a:buNone/>
             </a:pPr>
             <a:r>
@@ -26495,6 +26503,11 @@
               <a:spcAft>
                 <a:spcPts val="0"/>
               </a:spcAft>
+              <a:buClr>
+                <a:srgbClr val="000000"/>
+              </a:buClr>
+              <a:buSzPts val="5000"/>
+              <a:buFont typeface="Arial"/>
               <a:buNone/>
             </a:pPr>
             <a:r>
@@ -26566,7 +26579,7 @@
             <a:effectLst>
               <a:outerShdw blurRad="57785" algn="ctr" dir="3180000" dist="33020">
                 <a:srgbClr val="000000">
-                  <a:alpha val="30200"/>
+                  <a:alpha val="30196"/>
                 </a:srgbClr>
               </a:outerShdw>
             </a:effectLst>
@@ -26587,6 +26600,11 @@
                 <a:spcAft>
                   <a:spcPts val="0"/>
                 </a:spcAft>
+                <a:buClr>
+                  <a:srgbClr val="000000"/>
+                </a:buClr>
+                <a:buSzPts val="6600"/>
+                <a:buFont typeface="Arial"/>
                 <a:buNone/>
               </a:pPr>
               <a:r>
@@ -26639,6 +26657,11 @@
                 <a:spcAft>
                   <a:spcPts val="0"/>
                 </a:spcAft>
+                <a:buClr>
+                  <a:srgbClr val="000000"/>
+                </a:buClr>
+                <a:buSzPts val="7200"/>
+                <a:buFont typeface="Arial"/>
                 <a:buNone/>
               </a:pPr>
               <a:r>
@@ -26653,7 +26676,15 @@
                 </a:rPr>
                 <a:t>A</a:t>
               </a:r>
-              <a:endParaRPr/>
+              <a:endParaRPr b="0" i="0" sz="1400" u="none" cap="none" strike="noStrike">
+                <a:solidFill>
+                  <a:srgbClr val="000000"/>
+                </a:solidFill>
+                <a:latin typeface="Arial"/>
+                <a:ea typeface="Arial"/>
+                <a:cs typeface="Arial"/>
+                <a:sym typeface="Arial"/>
+              </a:endParaRPr>
             </a:p>
           </p:txBody>
         </p:sp>
@@ -26703,7 +26734,7 @@
             <a:effectLst>
               <a:outerShdw blurRad="57785" algn="ctr" dir="3180000" dist="33020">
                 <a:srgbClr val="000000">
-                  <a:alpha val="30200"/>
+                  <a:alpha val="30196"/>
                 </a:srgbClr>
               </a:outerShdw>
             </a:effectLst>
@@ -26724,6 +26755,11 @@
                 <a:spcAft>
                   <a:spcPts val="0"/>
                 </a:spcAft>
+                <a:buClr>
+                  <a:srgbClr val="000000"/>
+                </a:buClr>
+                <a:buSzPts val="6600"/>
+                <a:buFont typeface="Arial"/>
                 <a:buNone/>
               </a:pPr>
               <a:r>
@@ -26776,6 +26812,11 @@
                 <a:spcAft>
                   <a:spcPts val="0"/>
                 </a:spcAft>
+                <a:buClr>
+                  <a:srgbClr val="000000"/>
+                </a:buClr>
+                <a:buSzPts val="7200"/>
+                <a:buFont typeface="Arial"/>
                 <a:buNone/>
               </a:pPr>
               <a:r>
@@ -26790,7 +26831,15 @@
                 </a:rPr>
                 <a:t>B</a:t>
               </a:r>
-              <a:endParaRPr/>
+              <a:endParaRPr b="0" i="0" sz="1400" u="none" cap="none" strike="noStrike">
+                <a:solidFill>
+                  <a:srgbClr val="000000"/>
+                </a:solidFill>
+                <a:latin typeface="Arial"/>
+                <a:ea typeface="Arial"/>
+                <a:cs typeface="Arial"/>
+                <a:sym typeface="Arial"/>
+              </a:endParaRPr>
             </a:p>
           </p:txBody>
         </p:sp>
@@ -26840,7 +26889,7 @@
             <a:effectLst>
               <a:outerShdw blurRad="57785" algn="ctr" dir="3180000" dist="33020">
                 <a:srgbClr val="000000">
-                  <a:alpha val="30200"/>
+                  <a:alpha val="30196"/>
                 </a:srgbClr>
               </a:outerShdw>
             </a:effectLst>
@@ -26861,6 +26910,11 @@
                 <a:spcAft>
                   <a:spcPts val="0"/>
                 </a:spcAft>
+                <a:buClr>
+                  <a:srgbClr val="000000"/>
+                </a:buClr>
+                <a:buSzPts val="6600"/>
+                <a:buFont typeface="Arial"/>
                 <a:buNone/>
               </a:pPr>
               <a:r>
@@ -26913,6 +26967,11 @@
                 <a:spcAft>
                   <a:spcPts val="0"/>
                 </a:spcAft>
+                <a:buClr>
+                  <a:srgbClr val="000000"/>
+                </a:buClr>
+                <a:buSzPts val="7200"/>
+                <a:buFont typeface="Arial"/>
                 <a:buNone/>
               </a:pPr>
               <a:r>
@@ -26927,7 +26986,15 @@
                 </a:rPr>
                 <a:t>C</a:t>
               </a:r>
-              <a:endParaRPr/>
+              <a:endParaRPr b="0" i="0" sz="1400" u="none" cap="none" strike="noStrike">
+                <a:solidFill>
+                  <a:srgbClr val="000000"/>
+                </a:solidFill>
+                <a:latin typeface="Arial"/>
+                <a:ea typeface="Arial"/>
+                <a:cs typeface="Arial"/>
+                <a:sym typeface="Arial"/>
+              </a:endParaRPr>
             </a:p>
           </p:txBody>
         </p:sp>
@@ -26977,7 +27044,7 @@
             <a:effectLst>
               <a:outerShdw blurRad="57785" algn="ctr" dir="3180000" dist="33020">
                 <a:srgbClr val="000000">
-                  <a:alpha val="30200"/>
+                  <a:alpha val="30196"/>
                 </a:srgbClr>
               </a:outerShdw>
             </a:effectLst>
@@ -26998,6 +27065,11 @@
                 <a:spcAft>
                   <a:spcPts val="0"/>
                 </a:spcAft>
+                <a:buClr>
+                  <a:srgbClr val="000000"/>
+                </a:buClr>
+                <a:buSzPts val="6600"/>
+                <a:buFont typeface="Arial"/>
                 <a:buNone/>
               </a:pPr>
               <a:r>
@@ -27050,6 +27122,11 @@
                 <a:spcAft>
                   <a:spcPts val="0"/>
                 </a:spcAft>
+                <a:buClr>
+                  <a:srgbClr val="000000"/>
+                </a:buClr>
+                <a:buSzPts val="7200"/>
+                <a:buFont typeface="Arial"/>
                 <a:buNone/>
               </a:pPr>
               <a:r>
@@ -27064,7 +27141,15 @@
                 </a:rPr>
                 <a:t>D</a:t>
               </a:r>
-              <a:endParaRPr/>
+              <a:endParaRPr b="0" i="0" sz="1400" u="none" cap="none" strike="noStrike">
+                <a:solidFill>
+                  <a:srgbClr val="000000"/>
+                </a:solidFill>
+                <a:latin typeface="Arial"/>
+                <a:ea typeface="Arial"/>
+                <a:cs typeface="Arial"/>
+                <a:sym typeface="Arial"/>
+              </a:endParaRPr>
             </a:p>
           </p:txBody>
         </p:sp>
@@ -27104,6 +27189,11 @@
               <a:spcAft>
                 <a:spcPts val="0"/>
               </a:spcAft>
+              <a:buClr>
+                <a:srgbClr val="000000"/>
+              </a:buClr>
+              <a:buSzPts val="5000"/>
+              <a:buFont typeface="Arial"/>
               <a:buNone/>
             </a:pPr>
             <a:r>
@@ -27162,7 +27252,7 @@
     </p:bg>
     <p:spTree>
       <p:nvGrpSpPr>
-        <p:cNvPr id="276" name="Shape 276"/>
+        <p:cNvPr id="275" name="Shape 275"/>
         <p:cNvGrpSpPr/>
         <p:nvPr/>
       </p:nvGrpSpPr>
@@ -27176,230 +27266,7 @@
       </p:grpSpPr>
       <p:grpSp>
         <p:nvGrpSpPr>
-          <p:cNvPr id="277" name="Google Shape;277;p24"/>
-          <p:cNvGrpSpPr/>
-          <p:nvPr/>
-        </p:nvGrpSpPr>
-        <p:grpSpPr>
-          <a:xfrm>
-            <a:off x="8382306" y="7991788"/>
-            <a:ext cx="22962926" cy="7074846"/>
-            <a:chOff x="8382306" y="7991788"/>
-            <a:chExt cx="22962926" cy="7074846"/>
-          </a:xfrm>
-        </p:grpSpPr>
-        <p:grpSp>
-          <p:nvGrpSpPr>
-            <p:cNvPr id="278" name="Google Shape;278;p24"/>
-            <p:cNvGrpSpPr/>
-            <p:nvPr/>
-          </p:nvGrpSpPr>
-          <p:grpSpPr>
-            <a:xfrm>
-              <a:off x="8382306" y="7991788"/>
-              <a:ext cx="19811388" cy="4590424"/>
-              <a:chOff x="9695019" y="16315998"/>
-              <a:chExt cx="1466724" cy="1462650"/>
-            </a:xfrm>
-          </p:grpSpPr>
-          <p:sp>
-            <p:nvSpPr>
-              <p:cNvPr id="279" name="Google Shape;279;p24"/>
-              <p:cNvSpPr/>
-              <p:nvPr/>
-            </p:nvSpPr>
-            <p:spPr>
-              <a:xfrm>
-                <a:off x="9699095" y="16315998"/>
-                <a:ext cx="1462648" cy="1462650"/>
-              </a:xfrm>
-              <a:prstGeom prst="roundRect">
-                <a:avLst>
-                  <a:gd fmla="val 16667" name="adj"/>
-                </a:avLst>
-              </a:prstGeom>
-              <a:solidFill>
-                <a:srgbClr val="C00000"/>
-              </a:solidFill>
-              <a:ln cap="flat" cmpd="sng" w="38100">
-                <a:solidFill>
-                  <a:srgbClr val="FF0000"/>
-                </a:solidFill>
-                <a:prstDash val="solid"/>
-                <a:round/>
-                <a:headEnd len="sm" w="sm" type="none"/>
-                <a:tailEnd len="sm" w="sm" type="none"/>
-              </a:ln>
-              <a:effectLst>
-                <a:outerShdw blurRad="57785" algn="ctr" dir="3180000" dist="33020">
-                  <a:srgbClr val="000000">
-                    <a:alpha val="30196"/>
-                  </a:srgbClr>
-                </a:outerShdw>
-              </a:effectLst>
-            </p:spPr>
-            <p:txBody>
-              <a:bodyPr anchorCtr="0" anchor="ctr" bIns="45700" lIns="91425" spcFirstLastPara="1" rIns="91425" wrap="square" tIns="45700">
-                <a:noAutofit/>
-              </a:bodyPr>
-              <a:lstStyle/>
-              <a:p>
-                <a:pPr indent="0" lvl="0" marL="0" marR="0" rtl="0" algn="ctr">
-                  <a:lnSpc>
-                    <a:spcPct val="100000"/>
-                  </a:lnSpc>
-                  <a:spcBef>
-                    <a:spcPts val="0"/>
-                  </a:spcBef>
-                  <a:spcAft>
-                    <a:spcPts val="0"/>
-                  </a:spcAft>
-                  <a:buNone/>
-                </a:pPr>
-                <a:r>
-                  <a:t/>
-                </a:r>
-                <a:endParaRPr b="0" i="0" sz="6600" u="none" cap="none" strike="noStrike">
-                  <a:solidFill>
-                    <a:schemeClr val="lt1"/>
-                  </a:solidFill>
-                  <a:latin typeface="Calibri"/>
-                  <a:ea typeface="Calibri"/>
-                  <a:cs typeface="Calibri"/>
-                  <a:sym typeface="Calibri"/>
-                </a:endParaRPr>
-              </a:p>
-            </p:txBody>
-          </p:sp>
-          <p:sp>
-            <p:nvSpPr>
-              <p:cNvPr id="280" name="Google Shape;280;p24"/>
-              <p:cNvSpPr txBox="1"/>
-              <p:nvPr/>
-            </p:nvSpPr>
-            <p:spPr>
-              <a:xfrm>
-                <a:off x="9695019" y="16413229"/>
-                <a:ext cx="1466724" cy="1201322"/>
-              </a:xfrm>
-              <a:prstGeom prst="rect">
-                <a:avLst/>
-              </a:prstGeom>
-              <a:noFill/>
-              <a:ln>
-                <a:noFill/>
-              </a:ln>
-            </p:spPr>
-            <p:txBody>
-              <a:bodyPr anchorCtr="0" anchor="t" bIns="45700" lIns="91425" spcFirstLastPara="1" rIns="91425" wrap="square" tIns="45700">
-                <a:spAutoFit/>
-              </a:bodyPr>
-              <a:lstStyle/>
-              <a:p>
-                <a:pPr indent="-2346325" lvl="0" marL="2346325" marR="0" rtl="0" algn="ctr">
-                  <a:lnSpc>
-                    <a:spcPct val="100000"/>
-                  </a:lnSpc>
-                  <a:spcBef>
-                    <a:spcPts val="0"/>
-                  </a:spcBef>
-                  <a:spcAft>
-                    <a:spcPts val="0"/>
-                  </a:spcAft>
-                  <a:buNone/>
-                </a:pPr>
-                <a:r>
-                  <a:rPr b="1" i="0" lang="en-IN" sz="23900" u="none" cap="none" strike="noStrike">
-                    <a:solidFill>
-                      <a:schemeClr val="lt1"/>
-                    </a:solidFill>
-                    <a:latin typeface="Cambria"/>
-                    <a:ea typeface="Cambria"/>
-                    <a:cs typeface="Cambria"/>
-                    <a:sym typeface="Cambria"/>
-                  </a:rPr>
-                  <a:t>THANK YOU</a:t>
-                </a:r>
-                <a:endParaRPr/>
-              </a:p>
-            </p:txBody>
-          </p:sp>
-        </p:grpSp>
-        <p:pic>
-          <p:nvPicPr>
-            <p:cNvPr id="281" name="Google Shape;281;p24"/>
-            <p:cNvPicPr preferRelativeResize="0"/>
-            <p:nvPr/>
-          </p:nvPicPr>
-          <p:blipFill rotWithShape="1">
-            <a:blip r:embed="rId3">
-              <a:alphaModFix/>
-            </a:blip>
-            <a:srcRect b="0" l="0" r="0" t="0"/>
-            <a:stretch/>
-          </p:blipFill>
-          <p:spPr>
-            <a:xfrm flipH="1">
-              <a:off x="24932046" y="8634025"/>
-              <a:ext cx="6413186" cy="6432609"/>
-            </a:xfrm>
-            <a:prstGeom prst="rect">
-              <a:avLst/>
-            </a:prstGeom>
-            <a:noFill/>
-            <a:ln>
-              <a:noFill/>
-            </a:ln>
-          </p:spPr>
-        </p:pic>
-      </p:grpSp>
-    </p:spTree>
-  </p:cSld>
-  <p:clrMapOvr>
-    <a:masterClrMapping/>
-  </p:clrMapOvr>
-  <mc:AlternateContent>
-    <mc:Choice Requires="p14">
-      <p:transition spd="slow" p14:dur="900">
-        <p:fade thruBlk="1"/>
-      </p:transition>
-    </mc:Choice>
-    <mc:Fallback>
-      <p:transition spd="slow">
-        <p:fade/>
-      </p:transition>
-    </mc:Fallback>
-  </mc:AlternateContent>
-</p:sld>
-</file>
-
-<file path=ppt/slides/slide13.xml><?xml version="1.0" encoding="utf-8"?>
-<p:sld xmlns:a="http://schemas.openxmlformats.org/drawingml/2006/main" xmlns:r="http://schemas.openxmlformats.org/officeDocument/2006/relationships" xmlns:mc="http://schemas.openxmlformats.org/markup-compatibility/2006" xmlns:mv="urn:schemas-microsoft-com:mac:vml" xmlns:p="http://schemas.openxmlformats.org/presentationml/2006/main" xmlns:c="http://schemas.openxmlformats.org/drawingml/2006/chart" xmlns:dgm="http://schemas.openxmlformats.org/drawingml/2006/diagram" xmlns:o="urn:schemas-microsoft-com:office:office" xmlns:v="urn:schemas-microsoft-com:vml" xmlns:pvml="urn:schemas-microsoft-com:office:powerpoint" xmlns:com="http://schemas.openxmlformats.org/drawingml/2006/compatibility" xmlns:p14="http://schemas.microsoft.com/office/powerpoint/2010/main" xmlns:p15="http://schemas.microsoft.com/office/powerpoint/2012/main" xmlns:ahyp="http://schemas.microsoft.com/office/drawing/2018/hyperlinkcolor">
-  <p:cSld>
-    <p:bg>
-      <p:bgPr>
-        <a:solidFill>
-          <a:schemeClr val="dk1"/>
-        </a:solidFill>
-      </p:bgPr>
-    </p:bg>
-    <p:spTree>
-      <p:nvGrpSpPr>
-        <p:cNvPr id="285" name="Shape 285"/>
-        <p:cNvGrpSpPr/>
-        <p:nvPr/>
-      </p:nvGrpSpPr>
-      <p:grpSpPr>
-        <a:xfrm>
-          <a:off x="0" y="0"/>
-          <a:ext cx="0" cy="0"/>
-          <a:chOff x="0" y="0"/>
-          <a:chExt cx="0" cy="0"/>
-        </a:xfrm>
-      </p:grpSpPr>
-      <p:grpSp>
-        <p:nvGrpSpPr>
-          <p:cNvPr id="286" name="Google Shape;286;p25"/>
+          <p:cNvPr id="276" name="Google Shape;276;p24"/>
           <p:cNvGrpSpPr/>
           <p:nvPr/>
         </p:nvGrpSpPr>
@@ -27413,7 +27280,7 @@
         </p:grpSpPr>
         <p:sp>
           <p:nvSpPr>
-            <p:cNvPr id="287" name="Google Shape;287;p25"/>
+            <p:cNvPr id="277" name="Google Shape;277;p24"/>
             <p:cNvSpPr/>
             <p:nvPr/>
           </p:nvSpPr>
@@ -27456,6 +27323,11 @@
                 <a:spcAft>
                   <a:spcPts val="0"/>
                 </a:spcAft>
+                <a:buClr>
+                  <a:srgbClr val="000000"/>
+                </a:buClr>
+                <a:buSzPts val="1800"/>
+                <a:buFont typeface="Arial"/>
                 <a:buNone/>
               </a:pPr>
               <a:r>
@@ -27475,7 +27347,7 @@
         </p:sp>
         <p:sp>
           <p:nvSpPr>
-            <p:cNvPr id="288" name="Google Shape;288;p25"/>
+            <p:cNvPr id="278" name="Google Shape;278;p24"/>
             <p:cNvSpPr txBox="1"/>
             <p:nvPr/>
           </p:nvSpPr>
@@ -27508,6 +27380,11 @@
                 <a:spcAft>
                   <a:spcPts val="0"/>
                 </a:spcAft>
+                <a:buClr>
+                  <a:srgbClr val="000000"/>
+                </a:buClr>
+                <a:buSzPts val="8000"/>
+                <a:buFont typeface="Arial"/>
                 <a:buNone/>
               </a:pPr>
               <a:r>
@@ -27536,7 +27413,7 @@
         </p:sp>
         <p:pic>
           <p:nvPicPr>
-            <p:cNvPr id="289" name="Google Shape;289;p25"/>
+            <p:cNvPr id="279" name="Google Shape;279;p24"/>
             <p:cNvPicPr preferRelativeResize="0"/>
             <p:nvPr/>
           </p:nvPicPr>
@@ -27571,7 +27448,7 @@
       </p:grpSp>
       <p:grpSp>
         <p:nvGrpSpPr>
-          <p:cNvPr id="290" name="Google Shape;290;p25"/>
+          <p:cNvPr id="280" name="Google Shape;280;p24"/>
           <p:cNvGrpSpPr/>
           <p:nvPr/>
         </p:nvGrpSpPr>
@@ -27585,7 +27462,7 @@
         </p:grpSpPr>
         <p:grpSp>
           <p:nvGrpSpPr>
-            <p:cNvPr id="291" name="Google Shape;291;p25"/>
+            <p:cNvPr id="281" name="Google Shape;281;p24"/>
             <p:cNvGrpSpPr/>
             <p:nvPr/>
           </p:nvGrpSpPr>
@@ -27599,7 +27476,7 @@
           </p:grpSpPr>
           <p:sp>
             <p:nvSpPr>
-              <p:cNvPr id="292" name="Google Shape;292;p25"/>
+              <p:cNvPr id="282" name="Google Shape;282;p24"/>
               <p:cNvSpPr txBox="1"/>
               <p:nvPr/>
             </p:nvSpPr>
@@ -27665,7 +27542,7 @@
           </p:sp>
           <p:sp>
             <p:nvSpPr>
-              <p:cNvPr id="293" name="Google Shape;293;p25"/>
+              <p:cNvPr id="283" name="Google Shape;283;p24"/>
               <p:cNvSpPr txBox="1"/>
               <p:nvPr/>
             </p:nvSpPr>
@@ -27731,7 +27608,7 @@
           </p:sp>
           <p:sp>
             <p:nvSpPr>
-              <p:cNvPr id="294" name="Google Shape;294;p25"/>
+              <p:cNvPr id="284" name="Google Shape;284;p24"/>
               <p:cNvSpPr txBox="1"/>
               <p:nvPr/>
             </p:nvSpPr>
@@ -27798,7 +27675,7 @@
         </p:grpSp>
         <p:sp>
           <p:nvSpPr>
-            <p:cNvPr id="295" name="Google Shape;295;p25"/>
+            <p:cNvPr id="285" name="Google Shape;285;p24"/>
             <p:cNvSpPr/>
             <p:nvPr/>
           </p:nvSpPr>
@@ -27860,7 +27737,7 @@
         </p:sp>
         <p:sp>
           <p:nvSpPr>
-            <p:cNvPr id="296" name="Google Shape;296;p25"/>
+            <p:cNvPr id="286" name="Google Shape;286;p24"/>
             <p:cNvSpPr txBox="1"/>
             <p:nvPr/>
           </p:nvSpPr>
@@ -27893,6 +27770,11 @@
                 <a:spcAft>
                   <a:spcPts val="0"/>
                 </a:spcAft>
+                <a:buClr>
+                  <a:srgbClr val="000000"/>
+                </a:buClr>
+                <a:buSzPts val="5000"/>
+                <a:buFont typeface="Arial"/>
                 <a:buNone/>
               </a:pPr>
               <a:r>
@@ -27921,7 +27803,7 @@
         </p:sp>
         <p:sp>
           <p:nvSpPr>
-            <p:cNvPr id="297" name="Google Shape;297;p25"/>
+            <p:cNvPr id="287" name="Google Shape;287;p24"/>
             <p:cNvSpPr/>
             <p:nvPr/>
           </p:nvSpPr>
@@ -27997,7 +27879,7 @@
         </p:sp>
         <p:sp>
           <p:nvSpPr>
-            <p:cNvPr id="298" name="Google Shape;298;p25"/>
+            <p:cNvPr id="288" name="Google Shape;288;p24"/>
             <p:cNvSpPr txBox="1"/>
             <p:nvPr/>
           </p:nvSpPr>
@@ -28123,7 +28005,7 @@
         </p:sp>
         <p:grpSp>
           <p:nvGrpSpPr>
-            <p:cNvPr id="299" name="Google Shape;299;p25"/>
+            <p:cNvPr id="289" name="Google Shape;289;p24"/>
             <p:cNvGrpSpPr/>
             <p:nvPr/>
           </p:nvGrpSpPr>
@@ -28137,7 +28019,7 @@
           </p:grpSpPr>
           <p:sp>
             <p:nvSpPr>
-              <p:cNvPr id="300" name="Google Shape;300;p25"/>
+              <p:cNvPr id="290" name="Google Shape;290;p24"/>
               <p:cNvSpPr txBox="1"/>
               <p:nvPr/>
             </p:nvSpPr>
@@ -28203,7 +28085,7 @@
           </p:sp>
           <p:sp>
             <p:nvSpPr>
-              <p:cNvPr id="301" name="Google Shape;301;p25"/>
+              <p:cNvPr id="291" name="Google Shape;291;p24"/>
               <p:cNvSpPr txBox="1"/>
               <p:nvPr/>
             </p:nvSpPr>
@@ -28269,7 +28151,7 @@
           </p:sp>
           <p:sp>
             <p:nvSpPr>
-              <p:cNvPr id="302" name="Google Shape;302;p25"/>
+              <p:cNvPr id="292" name="Google Shape;292;p24"/>
               <p:cNvSpPr txBox="1"/>
               <p:nvPr/>
             </p:nvSpPr>
@@ -28335,7 +28217,7 @@
           </p:sp>
           <p:sp>
             <p:nvSpPr>
-              <p:cNvPr id="303" name="Google Shape;303;p25"/>
+              <p:cNvPr id="293" name="Google Shape;293;p24"/>
               <p:cNvSpPr txBox="1"/>
               <p:nvPr/>
             </p:nvSpPr>
@@ -28401,7 +28283,7 @@
           </p:sp>
           <p:sp>
             <p:nvSpPr>
-              <p:cNvPr id="304" name="Google Shape;304;p25"/>
+              <p:cNvPr id="294" name="Google Shape;294;p24"/>
               <p:cNvSpPr/>
               <p:nvPr/>
             </p:nvSpPr>
@@ -28464,7 +28346,7 @@
         </p:grpSp>
         <p:grpSp>
           <p:nvGrpSpPr>
-            <p:cNvPr id="305" name="Google Shape;305;p25"/>
+            <p:cNvPr id="295" name="Google Shape;295;p24"/>
             <p:cNvGrpSpPr/>
             <p:nvPr/>
           </p:nvGrpSpPr>
@@ -28478,7 +28360,7 @@
           </p:grpSpPr>
           <p:sp>
             <p:nvSpPr>
-              <p:cNvPr id="306" name="Google Shape;306;p25"/>
+              <p:cNvPr id="296" name="Google Shape;296;p24"/>
               <p:cNvSpPr txBox="1"/>
               <p:nvPr/>
             </p:nvSpPr>
@@ -28544,7 +28426,7 @@
           </p:sp>
           <p:sp>
             <p:nvSpPr>
-              <p:cNvPr id="307" name="Google Shape;307;p25"/>
+              <p:cNvPr id="297" name="Google Shape;297;p24"/>
               <p:cNvSpPr txBox="1"/>
               <p:nvPr/>
             </p:nvSpPr>
@@ -28610,7 +28492,7 @@
           </p:sp>
           <p:sp>
             <p:nvSpPr>
-              <p:cNvPr id="308" name="Google Shape;308;p25"/>
+              <p:cNvPr id="298" name="Google Shape;298;p24"/>
               <p:cNvSpPr txBox="1"/>
               <p:nvPr/>
             </p:nvSpPr>
@@ -28676,7 +28558,7 @@
           </p:sp>
           <p:sp>
             <p:nvSpPr>
-              <p:cNvPr id="309" name="Google Shape;309;p25"/>
+              <p:cNvPr id="299" name="Google Shape;299;p24"/>
               <p:cNvSpPr txBox="1"/>
               <p:nvPr/>
             </p:nvSpPr>
@@ -28742,7 +28624,7 @@
           </p:sp>
           <p:sp>
             <p:nvSpPr>
-              <p:cNvPr id="310" name="Google Shape;310;p25"/>
+              <p:cNvPr id="300" name="Google Shape;300;p24"/>
               <p:cNvSpPr/>
               <p:nvPr/>
             </p:nvSpPr>
@@ -28805,7 +28687,7 @@
         </p:grpSp>
         <p:grpSp>
           <p:nvGrpSpPr>
-            <p:cNvPr id="311" name="Google Shape;311;p25"/>
+            <p:cNvPr id="301" name="Google Shape;301;p24"/>
             <p:cNvGrpSpPr/>
             <p:nvPr/>
           </p:nvGrpSpPr>
@@ -28819,7 +28701,7 @@
           </p:grpSpPr>
           <p:sp>
             <p:nvSpPr>
-              <p:cNvPr id="312" name="Google Shape;312;p25"/>
+              <p:cNvPr id="302" name="Google Shape;302;p24"/>
               <p:cNvSpPr txBox="1"/>
               <p:nvPr/>
             </p:nvSpPr>
@@ -28885,7 +28767,7 @@
           </p:sp>
           <p:sp>
             <p:nvSpPr>
-              <p:cNvPr id="313" name="Google Shape;313;p25"/>
+              <p:cNvPr id="303" name="Google Shape;303;p24"/>
               <p:cNvSpPr txBox="1"/>
               <p:nvPr/>
             </p:nvSpPr>
@@ -28951,7 +28833,7 @@
           </p:sp>
           <p:sp>
             <p:nvSpPr>
-              <p:cNvPr id="314" name="Google Shape;314;p25"/>
+              <p:cNvPr id="304" name="Google Shape;304;p24"/>
               <p:cNvSpPr txBox="1"/>
               <p:nvPr/>
             </p:nvSpPr>
@@ -29017,7 +28899,7 @@
           </p:sp>
           <p:sp>
             <p:nvSpPr>
-              <p:cNvPr id="315" name="Google Shape;315;p25"/>
+              <p:cNvPr id="305" name="Google Shape;305;p24"/>
               <p:cNvSpPr txBox="1"/>
               <p:nvPr/>
             </p:nvSpPr>
@@ -29083,7 +28965,7 @@
           </p:sp>
           <p:sp>
             <p:nvSpPr>
-              <p:cNvPr id="316" name="Google Shape;316;p25"/>
+              <p:cNvPr id="306" name="Google Shape;306;p24"/>
               <p:cNvSpPr/>
               <p:nvPr/>
             </p:nvSpPr>
@@ -29146,7 +29028,7 @@
         </p:grpSp>
         <p:cxnSp>
           <p:nvCxnSpPr>
-            <p:cNvPr id="317" name="Google Shape;317;p25"/>
+            <p:cNvPr id="307" name="Google Shape;307;p24"/>
             <p:cNvCxnSpPr/>
             <p:nvPr/>
           </p:nvCxnSpPr>
@@ -29172,7 +29054,7 @@
         </p:cxnSp>
         <p:cxnSp>
           <p:nvCxnSpPr>
-            <p:cNvPr id="318" name="Google Shape;318;p25"/>
+            <p:cNvPr id="308" name="Google Shape;308;p24"/>
             <p:cNvCxnSpPr/>
             <p:nvPr/>
           </p:nvCxnSpPr>
@@ -29198,7 +29080,7 @@
         </p:cxnSp>
         <p:cxnSp>
           <p:nvCxnSpPr>
-            <p:cNvPr id="319" name="Google Shape;319;p25"/>
+            <p:cNvPr id="309" name="Google Shape;309;p24"/>
             <p:cNvCxnSpPr/>
             <p:nvPr/>
           </p:nvCxnSpPr>
@@ -29326,6 +29208,11 @@
                 <a:spcAft>
                   <a:spcPts val="0"/>
                 </a:spcAft>
+                <a:buClr>
+                  <a:srgbClr val="000000"/>
+                </a:buClr>
+                <a:buSzPts val="1800"/>
+                <a:buFont typeface="Arial"/>
                 <a:buNone/>
               </a:pPr>
               <a:r>
@@ -29397,7 +29284,15 @@
                 </a:rPr>
                 <a:t>Topics to be covered</a:t>
               </a:r>
-              <a:endParaRPr/>
+              <a:endParaRPr b="0" i="0" sz="1400" u="none" cap="none" strike="noStrike">
+                <a:solidFill>
+                  <a:srgbClr val="000000"/>
+                </a:solidFill>
+                <a:latin typeface="Arial"/>
+                <a:ea typeface="Arial"/>
+                <a:cs typeface="Arial"/>
+                <a:sym typeface="Arial"/>
+              </a:endParaRPr>
             </a:p>
           </p:txBody>
         </p:sp>
@@ -29493,6 +29388,11 @@
                 <a:spcAft>
                   <a:spcPts val="0"/>
                 </a:spcAft>
+                <a:buClr>
+                  <a:srgbClr val="000000"/>
+                </a:buClr>
+                <a:buSzPts val="1400"/>
+                <a:buFont typeface="Arial"/>
                 <a:buNone/>
               </a:pPr>
               <a:r>
@@ -29574,6 +29474,11 @@
                 <a:spcAft>
                   <a:spcPts val="0"/>
                 </a:spcAft>
+                <a:buClr>
+                  <a:srgbClr val="000000"/>
+                </a:buClr>
+                <a:buSzPts val="1400"/>
+                <a:buFont typeface="Arial"/>
                 <a:buNone/>
               </a:pPr>
               <a:r>
@@ -29626,6 +29531,11 @@
                 <a:spcAft>
                   <a:spcPts val="0"/>
                 </a:spcAft>
+                <a:buClr>
+                  <a:srgbClr val="000000"/>
+                </a:buClr>
+                <a:buSzPts val="7200"/>
+                <a:buFont typeface="Arial"/>
                 <a:buNone/>
               </a:pPr>
               <a:r>
@@ -29640,7 +29550,15 @@
                 </a:rPr>
                 <a:t>1</a:t>
               </a:r>
-              <a:endParaRPr/>
+              <a:endParaRPr b="0" i="0" sz="1400" u="none" cap="none" strike="noStrike">
+                <a:solidFill>
+                  <a:srgbClr val="000000"/>
+                </a:solidFill>
+                <a:latin typeface="Arial"/>
+                <a:ea typeface="Arial"/>
+                <a:cs typeface="Arial"/>
+                <a:sym typeface="Arial"/>
+              </a:endParaRPr>
             </a:p>
           </p:txBody>
         </p:sp>
@@ -29702,6 +29620,11 @@
                 <a:spcAft>
                   <a:spcPts val="0"/>
                 </a:spcAft>
+                <a:buClr>
+                  <a:srgbClr val="000000"/>
+                </a:buClr>
+                <a:buSzPts val="1400"/>
+                <a:buFont typeface="Arial"/>
                 <a:buNone/>
               </a:pPr>
               <a:r>
@@ -29783,6 +29706,11 @@
                 <a:spcAft>
                   <a:spcPts val="0"/>
                 </a:spcAft>
+                <a:buClr>
+                  <a:srgbClr val="000000"/>
+                </a:buClr>
+                <a:buSzPts val="1400"/>
+                <a:buFont typeface="Arial"/>
                 <a:buNone/>
               </a:pPr>
               <a:r>
@@ -29835,6 +29763,11 @@
                 <a:spcAft>
                   <a:spcPts val="0"/>
                 </a:spcAft>
+                <a:buClr>
+                  <a:srgbClr val="000000"/>
+                </a:buClr>
+                <a:buSzPts val="7200"/>
+                <a:buFont typeface="Arial"/>
                 <a:buNone/>
               </a:pPr>
               <a:r>
@@ -29849,7 +29782,15 @@
                 </a:rPr>
                 <a:t>2</a:t>
               </a:r>
-              <a:endParaRPr/>
+              <a:endParaRPr b="0" i="0" sz="1400" u="none" cap="none" strike="noStrike">
+                <a:solidFill>
+                  <a:srgbClr val="000000"/>
+                </a:solidFill>
+                <a:latin typeface="Arial"/>
+                <a:ea typeface="Arial"/>
+                <a:cs typeface="Arial"/>
+                <a:sym typeface="Arial"/>
+              </a:endParaRPr>
             </a:p>
           </p:txBody>
         </p:sp>
@@ -29911,6 +29852,11 @@
                 <a:spcAft>
                   <a:spcPts val="0"/>
                 </a:spcAft>
+                <a:buClr>
+                  <a:srgbClr val="000000"/>
+                </a:buClr>
+                <a:buSzPts val="1400"/>
+                <a:buFont typeface="Arial"/>
                 <a:buNone/>
               </a:pPr>
               <a:r>
@@ -29992,6 +29938,11 @@
                 <a:spcAft>
                   <a:spcPts val="0"/>
                 </a:spcAft>
+                <a:buClr>
+                  <a:srgbClr val="000000"/>
+                </a:buClr>
+                <a:buSzPts val="1400"/>
+                <a:buFont typeface="Arial"/>
                 <a:buNone/>
               </a:pPr>
               <a:r>
@@ -30044,6 +29995,11 @@
                 <a:spcAft>
                   <a:spcPts val="0"/>
                 </a:spcAft>
+                <a:buClr>
+                  <a:srgbClr val="000000"/>
+                </a:buClr>
+                <a:buSzPts val="7200"/>
+                <a:buFont typeface="Arial"/>
                 <a:buNone/>
               </a:pPr>
               <a:r>
@@ -30058,7 +30014,15 @@
                 </a:rPr>
                 <a:t>3</a:t>
               </a:r>
-              <a:endParaRPr/>
+              <a:endParaRPr b="0" i="0" sz="1400" u="none" cap="none" strike="noStrike">
+                <a:solidFill>
+                  <a:srgbClr val="000000"/>
+                </a:solidFill>
+                <a:latin typeface="Arial"/>
+                <a:ea typeface="Arial"/>
+                <a:cs typeface="Arial"/>
+                <a:sym typeface="Arial"/>
+              </a:endParaRPr>
             </a:p>
           </p:txBody>
         </p:sp>
@@ -30120,6 +30084,11 @@
                 <a:spcAft>
                   <a:spcPts val="0"/>
                 </a:spcAft>
+                <a:buClr>
+                  <a:srgbClr val="000000"/>
+                </a:buClr>
+                <a:buSzPts val="1400"/>
+                <a:buFont typeface="Arial"/>
                 <a:buNone/>
               </a:pPr>
               <a:r>
@@ -30201,6 +30170,11 @@
                 <a:spcAft>
                   <a:spcPts val="0"/>
                 </a:spcAft>
+                <a:buClr>
+                  <a:srgbClr val="000000"/>
+                </a:buClr>
+                <a:buSzPts val="1400"/>
+                <a:buFont typeface="Arial"/>
                 <a:buNone/>
               </a:pPr>
               <a:r>
@@ -30253,6 +30227,11 @@
                 <a:spcAft>
                   <a:spcPts val="0"/>
                 </a:spcAft>
+                <a:buClr>
+                  <a:srgbClr val="000000"/>
+                </a:buClr>
+                <a:buSzPts val="7200"/>
+                <a:buFont typeface="Arial"/>
                 <a:buNone/>
               </a:pPr>
               <a:r>
@@ -30267,7 +30246,15 @@
                 </a:rPr>
                 <a:t>4</a:t>
               </a:r>
-              <a:endParaRPr/>
+              <a:endParaRPr b="0" i="0" sz="1400" u="none" cap="none" strike="noStrike">
+                <a:solidFill>
+                  <a:srgbClr val="000000"/>
+                </a:solidFill>
+                <a:latin typeface="Arial"/>
+                <a:ea typeface="Arial"/>
+                <a:cs typeface="Arial"/>
+                <a:sym typeface="Arial"/>
+              </a:endParaRPr>
             </a:p>
           </p:txBody>
         </p:sp>
@@ -30307,6 +30294,11 @@
               <a:spcAft>
                 <a:spcPts val="0"/>
               </a:spcAft>
+              <a:buClr>
+                <a:srgbClr val="000000"/>
+              </a:buClr>
+              <a:buSzPts val="6000"/>
+              <a:buFont typeface="Arial"/>
               <a:buNone/>
             </a:pPr>
             <a:r>
@@ -30321,7 +30313,15 @@
               </a:rPr>
               <a:t>Type option here</a:t>
             </a:r>
-            <a:endParaRPr/>
+            <a:endParaRPr b="0" i="0" sz="1400" u="none" cap="none" strike="noStrike">
+              <a:solidFill>
+                <a:srgbClr val="000000"/>
+              </a:solidFill>
+              <a:latin typeface="Arial"/>
+              <a:ea typeface="Arial"/>
+              <a:cs typeface="Arial"/>
+              <a:sym typeface="Arial"/>
+            </a:endParaRPr>
           </a:p>
         </p:txBody>
       </p:sp>
@@ -30360,6 +30360,11 @@
               <a:spcAft>
                 <a:spcPts val="0"/>
               </a:spcAft>
+              <a:buClr>
+                <a:srgbClr val="000000"/>
+              </a:buClr>
+              <a:buSzPts val="6000"/>
+              <a:buFont typeface="Arial"/>
               <a:buNone/>
             </a:pPr>
             <a:r>
@@ -30374,7 +30379,15 @@
               </a:rPr>
               <a:t>Type option here</a:t>
             </a:r>
-            <a:endParaRPr/>
+            <a:endParaRPr b="0" i="0" sz="1400" u="none" cap="none" strike="noStrike">
+              <a:solidFill>
+                <a:srgbClr val="000000"/>
+              </a:solidFill>
+              <a:latin typeface="Arial"/>
+              <a:ea typeface="Arial"/>
+              <a:cs typeface="Arial"/>
+              <a:sym typeface="Arial"/>
+            </a:endParaRPr>
           </a:p>
         </p:txBody>
       </p:sp>
@@ -30413,6 +30426,11 @@
               <a:spcAft>
                 <a:spcPts val="0"/>
               </a:spcAft>
+              <a:buClr>
+                <a:srgbClr val="000000"/>
+              </a:buClr>
+              <a:buSzPts val="6000"/>
+              <a:buFont typeface="Arial"/>
               <a:buNone/>
             </a:pPr>
             <a:r>
@@ -30427,7 +30445,15 @@
               </a:rPr>
               <a:t>Type option here</a:t>
             </a:r>
-            <a:endParaRPr/>
+            <a:endParaRPr b="0" i="0" sz="1400" u="none" cap="none" strike="noStrike">
+              <a:solidFill>
+                <a:srgbClr val="000000"/>
+              </a:solidFill>
+              <a:latin typeface="Arial"/>
+              <a:ea typeface="Arial"/>
+              <a:cs typeface="Arial"/>
+              <a:sym typeface="Arial"/>
+            </a:endParaRPr>
           </a:p>
         </p:txBody>
       </p:sp>
@@ -30466,6 +30492,11 @@
               <a:spcAft>
                 <a:spcPts val="0"/>
               </a:spcAft>
+              <a:buClr>
+                <a:srgbClr val="000000"/>
+              </a:buClr>
+              <a:buSzPts val="6000"/>
+              <a:buFont typeface="Arial"/>
               <a:buNone/>
             </a:pPr>
             <a:r>
@@ -30480,7 +30511,15 @@
               </a:rPr>
               <a:t>Type option here</a:t>
             </a:r>
-            <a:endParaRPr/>
+            <a:endParaRPr b="0" i="0" sz="1400" u="none" cap="none" strike="noStrike">
+              <a:solidFill>
+                <a:srgbClr val="000000"/>
+              </a:solidFill>
+              <a:latin typeface="Arial"/>
+              <a:ea typeface="Arial"/>
+              <a:cs typeface="Arial"/>
+              <a:sym typeface="Arial"/>
+            </a:endParaRPr>
           </a:p>
         </p:txBody>
       </p:sp>
@@ -30719,6 +30758,11 @@
                 <a:spcAft>
                   <a:spcPts val="0"/>
                 </a:spcAft>
+                <a:buClr>
+                  <a:srgbClr val="000000"/>
+                </a:buClr>
+                <a:buSzPts val="1800"/>
+                <a:buFont typeface="Arial"/>
                 <a:buNone/>
               </a:pPr>
               <a:r>
@@ -30940,6 +30984,11 @@
                 <a:spcAft>
                   <a:spcPts val="0"/>
                 </a:spcAft>
+                <a:buClr>
+                  <a:srgbClr val="000000"/>
+                </a:buClr>
+                <a:buSzPts val="1800"/>
+                <a:buFont typeface="Arial"/>
                 <a:buNone/>
               </a:pPr>
               <a:r>
@@ -30992,6 +31041,11 @@
                 <a:spcAft>
                   <a:spcPts val="0"/>
                 </a:spcAft>
+                <a:buClr>
+                  <a:srgbClr val="000000"/>
+                </a:buClr>
+                <a:buSzPts val="6000"/>
+                <a:buFont typeface="Arial"/>
                 <a:buNone/>
               </a:pPr>
               <a:r>
@@ -31098,6 +31152,11 @@
               <a:spcAft>
                 <a:spcPts val="0"/>
               </a:spcAft>
+              <a:buClr>
+                <a:srgbClr val="000000"/>
+              </a:buClr>
+              <a:buSzPts val="5000"/>
+              <a:buFont typeface="Arial"/>
               <a:buNone/>
             </a:pPr>
             <a:r>
@@ -31112,7 +31171,15 @@
               </a:rPr>
               <a:t>Body Text</a:t>
             </a:r>
-            <a:endParaRPr/>
+            <a:endParaRPr b="0" i="0" sz="1400" u="none" cap="none" strike="noStrike">
+              <a:solidFill>
+                <a:srgbClr val="000000"/>
+              </a:solidFill>
+              <a:latin typeface="Arial"/>
+              <a:ea typeface="Arial"/>
+              <a:cs typeface="Arial"/>
+              <a:sym typeface="Arial"/>
+            </a:endParaRPr>
           </a:p>
           <a:p>
             <a:pPr indent="0" lvl="0" marL="0" marR="0" rtl="0" algn="l">
@@ -31125,6 +31192,11 @@
               <a:spcAft>
                 <a:spcPts val="0"/>
               </a:spcAft>
+              <a:buClr>
+                <a:srgbClr val="000000"/>
+              </a:buClr>
+              <a:buSzPts val="5000"/>
+              <a:buFont typeface="Arial"/>
               <a:buNone/>
             </a:pPr>
             <a:r>
@@ -31237,6 +31309,11 @@
                 <a:spcAft>
                   <a:spcPts val="0"/>
                 </a:spcAft>
+                <a:buClr>
+                  <a:srgbClr val="000000"/>
+                </a:buClr>
+                <a:buSzPts val="1800"/>
+                <a:buFont typeface="Arial"/>
                 <a:buNone/>
               </a:pPr>
               <a:r>
@@ -31289,6 +31366,11 @@
                 <a:spcAft>
                   <a:spcPts val="0"/>
                 </a:spcAft>
+                <a:buClr>
+                  <a:srgbClr val="000000"/>
+                </a:buClr>
+                <a:buSzPts val="6000"/>
+                <a:buFont typeface="Arial"/>
                 <a:buNone/>
               </a:pPr>
               <a:r>
@@ -31455,6 +31537,11 @@
                 <a:spcAft>
                   <a:spcPts val="0"/>
                 </a:spcAft>
+                <a:buClr>
+                  <a:srgbClr val="000000"/>
+                </a:buClr>
+                <a:buSzPts val="1800"/>
+                <a:buFont typeface="Arial"/>
                 <a:buNone/>
               </a:pPr>
               <a:r>
@@ -31507,6 +31594,11 @@
                 <a:spcAft>
                   <a:spcPts val="0"/>
                 </a:spcAft>
+                <a:buClr>
+                  <a:srgbClr val="000000"/>
+                </a:buClr>
+                <a:buSzPts val="6000"/>
+                <a:buFont typeface="Arial"/>
                 <a:buNone/>
               </a:pPr>
               <a:r>
@@ -31569,6 +31661,11 @@
               <a:spcAft>
                 <a:spcPts val="0"/>
               </a:spcAft>
+              <a:buClr>
+                <a:srgbClr val="000000"/>
+              </a:buClr>
+              <a:buSzPts val="6000"/>
+              <a:buFont typeface="Arial"/>
               <a:buNone/>
             </a:pPr>
             <a:r>
@@ -31630,6 +31727,11 @@
               <a:spcAft>
                 <a:spcPts val="0"/>
               </a:spcAft>
+              <a:buClr>
+                <a:srgbClr val="000000"/>
+              </a:buClr>
+              <a:buSzPts val="6000"/>
+              <a:buFont typeface="Arial"/>
               <a:buNone/>
             </a:pPr>
             <a:r>
@@ -31691,6 +31793,11 @@
               <a:spcAft>
                 <a:spcPts val="0"/>
               </a:spcAft>
+              <a:buClr>
+                <a:srgbClr val="000000"/>
+              </a:buClr>
+              <a:buSzPts val="6000"/>
+              <a:buFont typeface="Arial"/>
               <a:buNone/>
             </a:pPr>
             <a:r>
@@ -31752,6 +31859,11 @@
               <a:spcAft>
                 <a:spcPts val="0"/>
               </a:spcAft>
+              <a:buClr>
+                <a:srgbClr val="000000"/>
+              </a:buClr>
+              <a:buSzPts val="6000"/>
+              <a:buFont typeface="Arial"/>
               <a:buNone/>
             </a:pPr>
             <a:r>
@@ -31844,6 +31956,11 @@
                 <a:spcAft>
                   <a:spcPts val="0"/>
                 </a:spcAft>
+                <a:buClr>
+                  <a:srgbClr val="000000"/>
+                </a:buClr>
+                <a:buSzPts val="6600"/>
+                <a:buFont typeface="Arial"/>
                 <a:buNone/>
               </a:pPr>
               <a:r>
@@ -31896,6 +32013,11 @@
                 <a:spcAft>
                   <a:spcPts val="0"/>
                 </a:spcAft>
+                <a:buClr>
+                  <a:srgbClr val="000000"/>
+                </a:buClr>
+                <a:buSzPts val="7200"/>
+                <a:buFont typeface="Arial"/>
                 <a:buNone/>
               </a:pPr>
               <a:r>
@@ -31910,7 +32032,15 @@
                 </a:rPr>
                 <a:t>A</a:t>
               </a:r>
-              <a:endParaRPr/>
+              <a:endParaRPr b="0" i="0" sz="1400" u="none" cap="none" strike="noStrike">
+                <a:solidFill>
+                  <a:srgbClr val="000000"/>
+                </a:solidFill>
+                <a:latin typeface="Arial"/>
+                <a:ea typeface="Arial"/>
+                <a:cs typeface="Arial"/>
+                <a:sym typeface="Arial"/>
+              </a:endParaRPr>
             </a:p>
           </p:txBody>
         </p:sp>
@@ -31981,6 +32111,11 @@
                 <a:spcAft>
                   <a:spcPts val="0"/>
                 </a:spcAft>
+                <a:buClr>
+                  <a:srgbClr val="000000"/>
+                </a:buClr>
+                <a:buSzPts val="6600"/>
+                <a:buFont typeface="Arial"/>
                 <a:buNone/>
               </a:pPr>
               <a:r>
@@ -32033,6 +32168,11 @@
                 <a:spcAft>
                   <a:spcPts val="0"/>
                 </a:spcAft>
+                <a:buClr>
+                  <a:srgbClr val="000000"/>
+                </a:buClr>
+                <a:buSzPts val="7200"/>
+                <a:buFont typeface="Arial"/>
                 <a:buNone/>
               </a:pPr>
               <a:r>
@@ -32047,7 +32187,15 @@
                 </a:rPr>
                 <a:t>B</a:t>
               </a:r>
-              <a:endParaRPr/>
+              <a:endParaRPr b="0" i="0" sz="1400" u="none" cap="none" strike="noStrike">
+                <a:solidFill>
+                  <a:srgbClr val="000000"/>
+                </a:solidFill>
+                <a:latin typeface="Arial"/>
+                <a:ea typeface="Arial"/>
+                <a:cs typeface="Arial"/>
+                <a:sym typeface="Arial"/>
+              </a:endParaRPr>
             </a:p>
           </p:txBody>
         </p:sp>
@@ -32118,6 +32266,11 @@
                 <a:spcAft>
                   <a:spcPts val="0"/>
                 </a:spcAft>
+                <a:buClr>
+                  <a:srgbClr val="000000"/>
+                </a:buClr>
+                <a:buSzPts val="6600"/>
+                <a:buFont typeface="Arial"/>
                 <a:buNone/>
               </a:pPr>
               <a:r>
@@ -32170,6 +32323,11 @@
                 <a:spcAft>
                   <a:spcPts val="0"/>
                 </a:spcAft>
+                <a:buClr>
+                  <a:srgbClr val="000000"/>
+                </a:buClr>
+                <a:buSzPts val="7200"/>
+                <a:buFont typeface="Arial"/>
                 <a:buNone/>
               </a:pPr>
               <a:r>
@@ -32184,7 +32342,15 @@
                 </a:rPr>
                 <a:t>C</a:t>
               </a:r>
-              <a:endParaRPr/>
+              <a:endParaRPr b="0" i="0" sz="1400" u="none" cap="none" strike="noStrike">
+                <a:solidFill>
+                  <a:srgbClr val="000000"/>
+                </a:solidFill>
+                <a:latin typeface="Arial"/>
+                <a:ea typeface="Arial"/>
+                <a:cs typeface="Arial"/>
+                <a:sym typeface="Arial"/>
+              </a:endParaRPr>
             </a:p>
           </p:txBody>
         </p:sp>
@@ -32255,6 +32421,11 @@
                 <a:spcAft>
                   <a:spcPts val="0"/>
                 </a:spcAft>
+                <a:buClr>
+                  <a:srgbClr val="000000"/>
+                </a:buClr>
+                <a:buSzPts val="6600"/>
+                <a:buFont typeface="Arial"/>
                 <a:buNone/>
               </a:pPr>
               <a:r>
@@ -32307,6 +32478,11 @@
                 <a:spcAft>
                   <a:spcPts val="0"/>
                 </a:spcAft>
+                <a:buClr>
+                  <a:srgbClr val="000000"/>
+                </a:buClr>
+                <a:buSzPts val="7200"/>
+                <a:buFont typeface="Arial"/>
                 <a:buNone/>
               </a:pPr>
               <a:r>
@@ -32321,7 +32497,15 @@
                 </a:rPr>
                 <a:t>D</a:t>
               </a:r>
-              <a:endParaRPr/>
+              <a:endParaRPr b="0" i="0" sz="1400" u="none" cap="none" strike="noStrike">
+                <a:solidFill>
+                  <a:srgbClr val="000000"/>
+                </a:solidFill>
+                <a:latin typeface="Arial"/>
+                <a:ea typeface="Arial"/>
+                <a:cs typeface="Arial"/>
+                <a:sym typeface="Arial"/>
+              </a:endParaRPr>
             </a:p>
           </p:txBody>
         </p:sp>
@@ -32492,6 +32676,11 @@
               <a:spcAft>
                 <a:spcPts val="0"/>
               </a:spcAft>
+              <a:buClr>
+                <a:srgbClr val="000000"/>
+              </a:buClr>
+              <a:buSzPts val="6000"/>
+              <a:buFont typeface="Arial"/>
               <a:buNone/>
             </a:pPr>
             <a:r>
@@ -32553,6 +32742,11 @@
               <a:spcAft>
                 <a:spcPts val="0"/>
               </a:spcAft>
+              <a:buClr>
+                <a:srgbClr val="000000"/>
+              </a:buClr>
+              <a:buSzPts val="6000"/>
+              <a:buFont typeface="Arial"/>
               <a:buNone/>
             </a:pPr>
             <a:r>
@@ -32614,6 +32808,11 @@
               <a:spcAft>
                 <a:spcPts val="0"/>
               </a:spcAft>
+              <a:buClr>
+                <a:srgbClr val="000000"/>
+              </a:buClr>
+              <a:buSzPts val="6000"/>
+              <a:buFont typeface="Arial"/>
               <a:buNone/>
             </a:pPr>
             <a:r>
@@ -32675,6 +32874,11 @@
               <a:spcAft>
                 <a:spcPts val="0"/>
               </a:spcAft>
+              <a:buClr>
+                <a:srgbClr val="000000"/>
+              </a:buClr>
+              <a:buSzPts val="6000"/>
+              <a:buFont typeface="Arial"/>
               <a:buNone/>
             </a:pPr>
             <a:r>
@@ -32767,6 +32971,11 @@
                 <a:spcAft>
                   <a:spcPts val="0"/>
                 </a:spcAft>
+                <a:buClr>
+                  <a:srgbClr val="000000"/>
+                </a:buClr>
+                <a:buSzPts val="6600"/>
+                <a:buFont typeface="Arial"/>
                 <a:buNone/>
               </a:pPr>
               <a:r>
@@ -32819,6 +33028,11 @@
                 <a:spcAft>
                   <a:spcPts val="0"/>
                 </a:spcAft>
+                <a:buClr>
+                  <a:srgbClr val="000000"/>
+                </a:buClr>
+                <a:buSzPts val="7200"/>
+                <a:buFont typeface="Arial"/>
                 <a:buNone/>
               </a:pPr>
               <a:r>
@@ -32833,7 +33047,15 @@
                 </a:rPr>
                 <a:t>A</a:t>
               </a:r>
-              <a:endParaRPr/>
+              <a:endParaRPr b="0" i="0" sz="1400" u="none" cap="none" strike="noStrike">
+                <a:solidFill>
+                  <a:srgbClr val="000000"/>
+                </a:solidFill>
+                <a:latin typeface="Arial"/>
+                <a:ea typeface="Arial"/>
+                <a:cs typeface="Arial"/>
+                <a:sym typeface="Arial"/>
+              </a:endParaRPr>
             </a:p>
           </p:txBody>
         </p:sp>
@@ -32904,6 +33126,11 @@
                 <a:spcAft>
                   <a:spcPts val="0"/>
                 </a:spcAft>
+                <a:buClr>
+                  <a:srgbClr val="000000"/>
+                </a:buClr>
+                <a:buSzPts val="6600"/>
+                <a:buFont typeface="Arial"/>
                 <a:buNone/>
               </a:pPr>
               <a:r>
@@ -32956,6 +33183,11 @@
                 <a:spcAft>
                   <a:spcPts val="0"/>
                 </a:spcAft>
+                <a:buClr>
+                  <a:srgbClr val="000000"/>
+                </a:buClr>
+                <a:buSzPts val="7200"/>
+                <a:buFont typeface="Arial"/>
                 <a:buNone/>
               </a:pPr>
               <a:r>
@@ -32970,7 +33202,15 @@
                 </a:rPr>
                 <a:t>B</a:t>
               </a:r>
-              <a:endParaRPr/>
+              <a:endParaRPr b="0" i="0" sz="1400" u="none" cap="none" strike="noStrike">
+                <a:solidFill>
+                  <a:srgbClr val="000000"/>
+                </a:solidFill>
+                <a:latin typeface="Arial"/>
+                <a:ea typeface="Arial"/>
+                <a:cs typeface="Arial"/>
+                <a:sym typeface="Arial"/>
+              </a:endParaRPr>
             </a:p>
           </p:txBody>
         </p:sp>
@@ -33041,6 +33281,11 @@
                 <a:spcAft>
                   <a:spcPts val="0"/>
                 </a:spcAft>
+                <a:buClr>
+                  <a:srgbClr val="000000"/>
+                </a:buClr>
+                <a:buSzPts val="6600"/>
+                <a:buFont typeface="Arial"/>
                 <a:buNone/>
               </a:pPr>
               <a:r>
@@ -33093,6 +33338,11 @@
                 <a:spcAft>
                   <a:spcPts val="0"/>
                 </a:spcAft>
+                <a:buClr>
+                  <a:srgbClr val="000000"/>
+                </a:buClr>
+                <a:buSzPts val="7200"/>
+                <a:buFont typeface="Arial"/>
                 <a:buNone/>
               </a:pPr>
               <a:r>
@@ -33107,7 +33357,15 @@
                 </a:rPr>
                 <a:t>C</a:t>
               </a:r>
-              <a:endParaRPr/>
+              <a:endParaRPr b="0" i="0" sz="1400" u="none" cap="none" strike="noStrike">
+                <a:solidFill>
+                  <a:srgbClr val="000000"/>
+                </a:solidFill>
+                <a:latin typeface="Arial"/>
+                <a:ea typeface="Arial"/>
+                <a:cs typeface="Arial"/>
+                <a:sym typeface="Arial"/>
+              </a:endParaRPr>
             </a:p>
           </p:txBody>
         </p:sp>
@@ -33178,6 +33436,11 @@
                 <a:spcAft>
                   <a:spcPts val="0"/>
                 </a:spcAft>
+                <a:buClr>
+                  <a:srgbClr val="000000"/>
+                </a:buClr>
+                <a:buSzPts val="6600"/>
+                <a:buFont typeface="Arial"/>
                 <a:buNone/>
               </a:pPr>
               <a:r>
@@ -33230,6 +33493,11 @@
                 <a:spcAft>
                   <a:spcPts val="0"/>
                 </a:spcAft>
+                <a:buClr>
+                  <a:srgbClr val="000000"/>
+                </a:buClr>
+                <a:buSzPts val="7200"/>
+                <a:buFont typeface="Arial"/>
                 <a:buNone/>
               </a:pPr>
               <a:r>
@@ -33244,7 +33512,15 @@
                 </a:rPr>
                 <a:t>D</a:t>
               </a:r>
-              <a:endParaRPr/>
+              <a:endParaRPr b="0" i="0" sz="1400" u="none" cap="none" strike="noStrike">
+                <a:solidFill>
+                  <a:srgbClr val="000000"/>
+                </a:solidFill>
+                <a:latin typeface="Arial"/>
+                <a:ea typeface="Arial"/>
+                <a:cs typeface="Arial"/>
+                <a:sym typeface="Arial"/>
+              </a:endParaRPr>
             </a:p>
           </p:txBody>
         </p:sp>
@@ -33395,6 +33671,11 @@
                 <a:spcAft>
                   <a:spcPts val="0"/>
                 </a:spcAft>
+                <a:buClr>
+                  <a:srgbClr val="000000"/>
+                </a:buClr>
+                <a:buSzPts val="1800"/>
+                <a:buFont typeface="Arial"/>
                 <a:buNone/>
               </a:pPr>
               <a:r>
@@ -33447,6 +33728,11 @@
                 <a:spcAft>
                   <a:spcPts val="0"/>
                 </a:spcAft>
+                <a:buClr>
+                  <a:srgbClr val="000000"/>
+                </a:buClr>
+                <a:buSzPts val="6000"/>
+                <a:buFont typeface="Arial"/>
                 <a:buNone/>
               </a:pPr>
               <a:r>
@@ -33577,6 +33863,11 @@
                 <a:spcAft>
                   <a:spcPts val="0"/>
                 </a:spcAft>
+                <a:buClr>
+                  <a:srgbClr val="000000"/>
+                </a:buClr>
+                <a:buSzPts val="1800"/>
+                <a:buFont typeface="Arial"/>
                 <a:buNone/>
               </a:pPr>
               <a:r>
@@ -33648,7 +33939,15 @@
                 </a:rPr>
                 <a:t>Summary</a:t>
               </a:r>
-              <a:endParaRPr/>
+              <a:endParaRPr b="0" i="0" sz="1400" u="none" cap="none" strike="noStrike">
+                <a:solidFill>
+                  <a:srgbClr val="000000"/>
+                </a:solidFill>
+                <a:latin typeface="Arial"/>
+                <a:ea typeface="Arial"/>
+                <a:cs typeface="Arial"/>
+                <a:sym typeface="Arial"/>
+              </a:endParaRPr>
             </a:p>
           </p:txBody>
         </p:sp>
@@ -33790,6 +34089,11 @@
                 <a:spcAft>
                   <a:spcPts val="0"/>
                 </a:spcAft>
+                <a:buClr>
+                  <a:srgbClr val="000000"/>
+                </a:buClr>
+                <a:buSzPts val="1800"/>
+                <a:buFont typeface="Arial"/>
                 <a:buNone/>
               </a:pPr>
               <a:r>
@@ -33861,7 +34165,15 @@
                 </a:rPr>
                 <a:t>Homework</a:t>
               </a:r>
-              <a:endParaRPr/>
+              <a:endParaRPr b="0" i="0" sz="1400" u="none" cap="none" strike="noStrike">
+                <a:solidFill>
+                  <a:srgbClr val="000000"/>
+                </a:solidFill>
+                <a:latin typeface="Arial"/>
+                <a:ea typeface="Arial"/>
+                <a:cs typeface="Arial"/>
+                <a:sym typeface="Arial"/>
+              </a:endParaRPr>
             </a:p>
           </p:txBody>
         </p:sp>
